--- a/resumen-ejecutivo-semanal/presentacion_depto_riesgos.pptx
+++ b/resumen-ejecutivo-semanal/presentacion_depto_riesgos.pptx
@@ -973,8 +973,8 @@
         </p:nvSpPr>
         <p:spPr>
           <a:xfrm>
-            <a:off x="4611625" y="1193292"/>
-            <a:ext cx="1344328" cy="310896"/>
+            <a:off x="3419856" y="1207008"/>
+            <a:ext cx="4151376" cy="310896"/>
           </a:xfrm>
           <a:prstGeom prst="rect">
             <a:avLst/>
@@ -990,7 +990,7 @@
               <a:buNone/>
             </a:pPr>
             <a:r>
-              <a:rPr lang="en-US" sz="1200" b="1" dirty="0">
+              <a:rPr lang="en-US" sz="1300" b="1" dirty="0">
                 <a:solidFill>
                   <a:srgbClr val="FFFFFF"/>
                 </a:solidFill>
@@ -1004,6 +1004,30 @@
           </a:p>
         </p:txBody>
       </p:sp>
+      <p:pic>
+        <p:nvPicPr>
+          <p:cNvPr id="60" name="Icono Text 3"/>
+          <p:cNvPicPr>
+            <a:picLocks noChangeAspect="1"/>
+          </p:cNvPicPr>
+          <p:nvPr/>
+        </p:nvPicPr>
+        <p:blipFill>
+          <a:blip r:embed="rId7"/>
+          <a:stretch>
+            <a:fillRect/>
+          </a:stretch>
+        </p:blipFill>
+        <p:spPr>
+          <a:xfrm>
+            <a:off x="4636007" y="1271016"/>
+            <a:ext cx="182880" cy="182880"/>
+          </a:xfrm>
+          <a:prstGeom prst="rect">
+            <a:avLst/>
+          </a:prstGeom>
+        </p:spPr>
+      </p:pic>
       <p:sp>
         <p:nvSpPr>
           <p:cNvPr id="6" name="Shape 4"/>
@@ -1052,8 +1076,8 @@
         </p:nvSpPr>
         <p:spPr>
           <a:xfrm>
-            <a:off x="8741423" y="1203238"/>
-            <a:ext cx="1865857" cy="310896"/>
+            <a:off x="7708392" y="1207008"/>
+            <a:ext cx="4151376" cy="310896"/>
           </a:xfrm>
           <a:prstGeom prst="rect">
             <a:avLst/>
@@ -1069,7 +1093,7 @@
               <a:buNone/>
             </a:pPr>
             <a:r>
-              <a:rPr lang="en-US" sz="1200" b="1" dirty="0">
+              <a:rPr lang="en-US" sz="1300" b="1" dirty="0">
                 <a:solidFill>
                   <a:srgbClr val="FFFFFF"/>
                 </a:solidFill>
@@ -1083,6 +1107,30 @@
           </a:p>
         </p:txBody>
       </p:sp>
+      <p:pic>
+        <p:nvPicPr>
+          <p:cNvPr id="61" name="Icono Text 5"/>
+          <p:cNvPicPr>
+            <a:picLocks noChangeAspect="1"/>
+          </p:cNvPicPr>
+          <p:nvPr/>
+        </p:nvPicPr>
+        <p:blipFill>
+          <a:blip r:embed="rId8"/>
+          <a:stretch>
+            <a:fillRect/>
+          </a:stretch>
+        </p:blipFill>
+        <p:spPr>
+          <a:xfrm>
+            <a:off x="8558784" y="1271016"/>
+            <a:ext cx="182880" cy="182880"/>
+          </a:xfrm>
+          <a:prstGeom prst="rect">
+            <a:avLst/>
+          </a:prstGeom>
+        </p:spPr>
+      </p:pic>
       <p:sp>
         <p:nvSpPr>
           <p:cNvPr id="8" name="Shape 6"/>
@@ -1310,8 +1358,8 @@
         </p:nvSpPr>
         <p:spPr>
           <a:xfrm>
-            <a:off x="3319272" y="1773936"/>
-            <a:ext cx="4133088" cy="1225296"/>
+            <a:off x="3456432" y="1773936"/>
+            <a:ext cx="3913632" cy="1225296"/>
           </a:xfrm>
           <a:prstGeom prst="rect">
             <a:avLst/>

--- a/resumen-ejecutivo-semanal/presentacion_depto_riesgos.pptx
+++ b/resumen-ejecutivo-semanal/presentacion_depto_riesgos.pptx
@@ -374,8 +374,7 @@
           <a:lstStyle/>
           <a:p>
             <a:r>
-              <a:rPr lang="en-US" dirty="0"/>
-              <a:t>Matriz por frente. Columna izquierda: asuntos del informe anterior que siguen vigentes (plazos SSF). Columna derecha: actividades de la semana según el documento de actividades. Examen GIR 2026: avance 93%.</a:t>
+              <a:t>Actividades de la semana por frente (vertical). Capacitación y Examen GIR 2026: 98%. Proyecto de Avalúos: 80%.</a:t>
             </a:r>
           </a:p>
         </p:txBody>
@@ -927,14 +926,14 @@
       </p:sp>
       <p:sp>
         <p:nvSpPr>
-          <p:cNvPr id="4" name="Shape 2"/>
-          <p:cNvSpPr/>
-          <p:nvPr/>
-        </p:nvSpPr>
-        <p:spPr>
-          <a:xfrm>
-            <a:off x="3291840" y="1207008"/>
-            <a:ext cx="4151376" cy="310896"/>
+          <p:cNvPr id="6" name="Shape 4"/>
+          <p:cNvSpPr/>
+          <p:nvPr/>
+        </p:nvSpPr>
+        <p:spPr>
+          <a:xfrm>
+            <a:off x="8503920" y="786384"/>
+            <a:ext cx="3227832" cy="310896"/>
           </a:xfrm>
           <a:prstGeom prst="roundRect">
             <a:avLst>
@@ -967,117 +966,14 @@
       </p:sp>
       <p:sp>
         <p:nvSpPr>
-          <p:cNvPr id="5" name="Text 3"/>
-          <p:cNvSpPr txBox="1"/>
-          <p:nvPr/>
-        </p:nvSpPr>
-        <p:spPr>
-          <a:xfrm>
-            <a:off x="3419856" y="1207008"/>
-            <a:ext cx="4151376" cy="310896"/>
-          </a:xfrm>
-          <a:prstGeom prst="rect">
-            <a:avLst/>
-          </a:prstGeom>
-          <a:noFill/>
-          <a:ln/>
-        </p:spPr>
-        <p:txBody>
-          <a:bodyPr wrap="square" lIns="0" tIns="0" rIns="0" bIns="0" rtlCol="0" anchor="ctr"/>
-          <a:lstStyle/>
-          <a:p>
-            <a:pPr marL="0" indent="0" algn="ctr">
-              <a:buNone/>
-            </a:pPr>
-            <a:r>
-              <a:rPr lang="en-US" sz="1300" b="1" dirty="0">
-                <a:solidFill>
-                  <a:srgbClr val="FFFFFF"/>
-                </a:solidFill>
-                <a:latin typeface="Calibri" pitchFamily="34" charset="0"/>
-                <a:ea typeface="Calibri" pitchFamily="34" charset="-122"/>
-                <a:cs typeface="Calibri" pitchFamily="34" charset="-120"/>
-              </a:rPr>
-              <a:t>En seguimiento</a:t>
-            </a:r>
-            <a:endParaRPr lang="en-US" sz="1200" dirty="0"/>
-          </a:p>
-        </p:txBody>
-      </p:sp>
-      <p:pic>
-        <p:nvPicPr>
-          <p:cNvPr id="60" name="Icono Text 3"/>
-          <p:cNvPicPr>
-            <a:picLocks noChangeAspect="1"/>
-          </p:cNvPicPr>
-          <p:nvPr/>
-        </p:nvPicPr>
-        <p:blipFill>
-          <a:blip r:embed="rId7"/>
-          <a:stretch>
-            <a:fillRect/>
-          </a:stretch>
-        </p:blipFill>
-        <p:spPr>
-          <a:xfrm>
-            <a:off x="4636007" y="1271016"/>
-            <a:ext cx="182880" cy="182880"/>
-          </a:xfrm>
-          <a:prstGeom prst="rect">
-            <a:avLst/>
-          </a:prstGeom>
-        </p:spPr>
-      </p:pic>
-      <p:sp>
-        <p:nvSpPr>
-          <p:cNvPr id="6" name="Shape 4"/>
-          <p:cNvSpPr/>
-          <p:nvPr/>
-        </p:nvSpPr>
-        <p:spPr>
-          <a:xfrm>
-            <a:off x="7580376" y="1207008"/>
-            <a:ext cx="4151376" cy="310896"/>
-          </a:xfrm>
-          <a:prstGeom prst="roundRect">
-            <a:avLst>
-              <a:gd name="adj" fmla="val 50000"/>
-            </a:avLst>
-          </a:prstGeom>
-          <a:ln/>
-        </p:spPr>
-        <p:style>
-          <a:lnRef idx="1">
-            <a:schemeClr val="accent1"/>
-          </a:lnRef>
-          <a:fillRef idx="3">
-            <a:schemeClr val="accent1"/>
-          </a:fillRef>
-          <a:effectRef idx="2">
-            <a:schemeClr val="accent1"/>
-          </a:effectRef>
-          <a:fontRef idx="minor">
-            <a:schemeClr val="lt1"/>
-          </a:fontRef>
-        </p:style>
-        <p:txBody>
-          <a:bodyPr/>
-          <a:lstStyle/>
-          <a:p>
-            <a:endParaRPr lang="es-SV"/>
-          </a:p>
-        </p:txBody>
-      </p:sp>
-      <p:sp>
-        <p:nvSpPr>
           <p:cNvPr id="7" name="Text 5"/>
           <p:cNvSpPr txBox="1"/>
           <p:nvPr/>
         </p:nvSpPr>
         <p:spPr>
           <a:xfrm>
-            <a:off x="7708392" y="1207008"/>
-            <a:ext cx="4151376" cy="310896"/>
+            <a:off x="8732520" y="786384"/>
+            <a:ext cx="2999232" cy="310896"/>
           </a:xfrm>
           <a:prstGeom prst="rect">
             <a:avLst/>
@@ -1116,14 +1012,14 @@
           <p:nvPr/>
         </p:nvPicPr>
         <p:blipFill>
-          <a:blip r:embed="rId8"/>
+          <a:blip r:embed="rId4"/>
           <a:stretch>
             <a:fillRect/>
           </a:stretch>
         </p:blipFill>
         <p:spPr>
           <a:xfrm>
-            <a:off x="8558784" y="1271016"/>
+            <a:off x="8778240" y="850392"/>
             <a:ext cx="182880" cy="182880"/>
           </a:xfrm>
           <a:prstGeom prst="rect">
@@ -1139,8 +1035,8 @@
         </p:nvSpPr>
         <p:spPr>
           <a:xfrm>
-            <a:off x="457200" y="1627632"/>
-            <a:ext cx="2697480" cy="1371600"/>
+            <a:off x="457200" y="1234440"/>
+            <a:ext cx="2715768" cy="1097280"/>
           </a:xfrm>
           <a:prstGeom prst="roundRect">
             <a:avLst>
@@ -1204,7 +1100,7 @@
         </p:nvSpPr>
         <p:spPr>
           <a:xfrm>
-            <a:off x="621792" y="2130552"/>
+            <a:off x="621792" y="1600200"/>
             <a:ext cx="384048" cy="384048"/>
           </a:xfrm>
           <a:prstGeom prst="ellipse">
@@ -1237,14 +1133,14 @@
           <p:nvPr/>
         </p:nvPicPr>
         <p:blipFill>
-          <a:blip r:embed="rId3"/>
+          <a:blip r:embed="rId5"/>
           <a:stretch>
             <a:fillRect/>
           </a:stretch>
         </p:blipFill>
         <p:spPr>
           <a:xfrm>
-            <a:off x="722376" y="2231136"/>
+            <a:off x="722376" y="1700784"/>
             <a:ext cx="182880" cy="182880"/>
           </a:xfrm>
           <a:prstGeom prst="rect">
@@ -1260,7 +1156,7 @@
         </p:nvSpPr>
         <p:spPr>
           <a:xfrm>
-            <a:off x="1143000" y="2039112"/>
+            <a:off x="1143000" y="1508760"/>
             <a:ext cx="1920240" cy="566928"/>
           </a:xfrm>
           <a:prstGeom prst="rect">
@@ -1318,529 +1214,14 @@
       </p:sp>
       <p:sp>
         <p:nvSpPr>
-          <p:cNvPr id="12" name="Shape 9"/>
-          <p:cNvSpPr/>
-          <p:nvPr/>
-        </p:nvSpPr>
-        <p:spPr>
-          <a:xfrm>
-            <a:off x="3291840" y="1627632"/>
-            <a:ext cx="4151376" cy="1371600"/>
-          </a:xfrm>
-          <a:prstGeom prst="roundRect">
-            <a:avLst>
-              <a:gd name="adj" fmla="val 6667"/>
-            </a:avLst>
-          </a:prstGeom>
-          <a:solidFill>
-            <a:srgbClr val="EEF2F7"/>
-          </a:solidFill>
-          <a:ln w="12700">
-            <a:solidFill>
-              <a:srgbClr val="EEF2F7"/>
-            </a:solidFill>
-            <a:prstDash val="solid"/>
-          </a:ln>
-        </p:spPr>
-        <p:txBody>
-          <a:bodyPr/>
-          <a:lstStyle/>
-          <a:p>
-            <a:endParaRPr lang="es-SV"/>
-          </a:p>
-        </p:txBody>
-      </p:sp>
-      <p:sp>
-        <p:nvSpPr>
-          <p:cNvPr id="13" name="Text 10"/>
-          <p:cNvSpPr txBox="1"/>
-          <p:nvPr/>
-        </p:nvSpPr>
-        <p:spPr>
-          <a:xfrm>
-            <a:off x="3456432" y="1773936"/>
-            <a:ext cx="3913632" cy="1225296"/>
-          </a:xfrm>
-          <a:prstGeom prst="rect">
-            <a:avLst/>
-          </a:prstGeom>
-          <a:noFill/>
-          <a:ln/>
-        </p:spPr>
-        <p:txBody>
-          <a:bodyPr wrap="square" lIns="0" tIns="0" rIns="0" bIns="0" rtlCol="0" anchor="ctr"/>
-          <a:lstStyle/>
-          <a:p>
-            <a:pPr marL="0" indent="0">
-              <a:buNone/>
-            </a:pPr>
-            <a:r>
-              <a:rPr lang="en-US" sz="900" b="1" dirty="0">
-                <a:solidFill>
-                  <a:srgbClr val="0B2545"/>
-                </a:solidFill>
-                <a:latin typeface="Calibri" pitchFamily="34" charset="0"/>
-                <a:ea typeface="Calibri" pitchFamily="34" charset="-122"/>
-                <a:cs typeface="Calibri" pitchFamily="34" charset="-120"/>
-              </a:rPr>
-              <a:t>Resultados preliminares – </a:t>
-            </a:r>
-            <a:r>
-              <a:rPr lang="en-US" sz="900" b="1" dirty="0" err="1">
-                <a:solidFill>
-                  <a:srgbClr val="0B2545"/>
-                </a:solidFill>
-                <a:latin typeface="Calibri" pitchFamily="34" charset="0"/>
-                <a:ea typeface="Calibri" pitchFamily="34" charset="-122"/>
-                <a:cs typeface="Calibri" pitchFamily="34" charset="-120"/>
-              </a:rPr>
-              <a:t>Riesgos</a:t>
-            </a:r>
-            <a:r>
-              <a:rPr lang="en-US" sz="900" b="1" dirty="0">
-                <a:solidFill>
-                  <a:srgbClr val="0B2545"/>
-                </a:solidFill>
-                <a:latin typeface="Calibri" pitchFamily="34" charset="0"/>
-                <a:ea typeface="Calibri" pitchFamily="34" charset="-122"/>
-                <a:cs typeface="Calibri" pitchFamily="34" charset="-120"/>
-              </a:rPr>
-              <a:t> especificos PLD/FT  ·  </a:t>
-            </a:r>
-            <a:r>
-              <a:rPr lang="en-US" sz="900" dirty="0">
-                <a:solidFill>
-                  <a:srgbClr val="13507F"/>
-                </a:solidFill>
-                <a:latin typeface="Calibri" pitchFamily="34" charset="0"/>
-                <a:ea typeface="Calibri" pitchFamily="34" charset="-122"/>
-                <a:cs typeface="Calibri" pitchFamily="34" charset="-120"/>
-              </a:rPr>
-              <a:t>Circ. 23486</a:t>
-            </a:r>
-            <a:endParaRPr lang="en-US" sz="900" dirty="0"/>
-          </a:p>
-          <a:p>
-            <a:pPr marL="0" indent="0">
-              <a:spcAft>
-                <a:spcPts val="300"/>
-              </a:spcAft>
-              <a:buNone/>
-            </a:pPr>
-            <a:r>
-              <a:rPr lang="en-US" sz="900" b="1" dirty="0">
-                <a:solidFill>
-                  <a:srgbClr val="B86E00"/>
-                </a:solidFill>
-                <a:latin typeface="Calibri" pitchFamily="34" charset="0"/>
-                <a:ea typeface="Calibri" pitchFamily="34" charset="-122"/>
-                <a:cs typeface="Calibri" pitchFamily="34" charset="-120"/>
-              </a:rPr>
-              <a:t>Plazo 16/10/2026</a:t>
-            </a:r>
-            <a:endParaRPr lang="en-US" sz="900" dirty="0"/>
-          </a:p>
-          <a:p>
-            <a:pPr marL="0" indent="0">
-              <a:buNone/>
-            </a:pPr>
-            <a:r>
-              <a:rPr lang="en-US" sz="900" b="1" dirty="0">
-                <a:solidFill>
-                  <a:srgbClr val="0B2545"/>
-                </a:solidFill>
-                <a:latin typeface="Calibri" pitchFamily="34" charset="0"/>
-                <a:ea typeface="Calibri" pitchFamily="34" charset="-122"/>
-                <a:cs typeface="Calibri" pitchFamily="34" charset="-120"/>
-              </a:rPr>
-              <a:t>Resultados preliminares – Gobierno Corporativo  ·  </a:t>
-            </a:r>
-            <a:r>
-              <a:rPr lang="en-US" sz="900" dirty="0">
-                <a:solidFill>
-                  <a:srgbClr val="13507F"/>
-                </a:solidFill>
-                <a:latin typeface="Calibri" pitchFamily="34" charset="0"/>
-                <a:ea typeface="Calibri" pitchFamily="34" charset="-122"/>
-                <a:cs typeface="Calibri" pitchFamily="34" charset="-120"/>
-              </a:rPr>
-              <a:t>Circ. 22741</a:t>
-            </a:r>
-            <a:endParaRPr lang="en-US" sz="900" dirty="0"/>
-          </a:p>
-          <a:p>
-            <a:pPr marL="0" indent="0">
-              <a:buNone/>
-            </a:pPr>
-            <a:r>
-              <a:rPr lang="en-US" sz="900" b="1" dirty="0">
-                <a:solidFill>
-                  <a:srgbClr val="B86E00"/>
-                </a:solidFill>
-                <a:latin typeface="Calibri" pitchFamily="34" charset="0"/>
-                <a:ea typeface="Calibri" pitchFamily="34" charset="-122"/>
-                <a:cs typeface="Calibri" pitchFamily="34" charset="-120"/>
-              </a:rPr>
-              <a:t>Plazo 23/10/2026 · Nuevas observaciones</a:t>
-            </a:r>
-            <a:endParaRPr lang="en-US" sz="900" dirty="0"/>
-          </a:p>
-          <a:p>
-            <a:pPr marL="0" indent="0">
-              <a:spcAft>
-                <a:spcPts val="300"/>
-              </a:spcAft>
-              <a:buNone/>
-            </a:pPr>
-            <a:r>
-              <a:rPr lang="en-US" sz="900" b="1" dirty="0">
-                <a:solidFill>
-                  <a:srgbClr val="B86E00"/>
-                </a:solidFill>
-                <a:latin typeface="Calibri" pitchFamily="34" charset="0"/>
-                <a:ea typeface="Calibri" pitchFamily="34" charset="-122"/>
-                <a:cs typeface="Calibri" pitchFamily="34" charset="-120"/>
-              </a:rPr>
-              <a:t>Plazo 30/10/2026 · Seguimiento de observaciones</a:t>
-            </a:r>
-            <a:endParaRPr lang="en-US" sz="900" dirty="0"/>
-          </a:p>
-          <a:p>
-            <a:pPr marL="0" indent="0">
-              <a:buNone/>
-            </a:pPr>
-            <a:r>
-              <a:rPr lang="en-US" sz="900" b="1" dirty="0">
-                <a:solidFill>
-                  <a:srgbClr val="0B2545"/>
-                </a:solidFill>
-                <a:latin typeface="Calibri" pitchFamily="34" charset="0"/>
-                <a:ea typeface="Calibri" pitchFamily="34" charset="-122"/>
-                <a:cs typeface="Calibri" pitchFamily="34" charset="-120"/>
-              </a:rPr>
-              <a:t>Resultado preliminar Plan de Recuperación  ·  </a:t>
-            </a:r>
-            <a:r>
-              <a:rPr lang="en-US" sz="900" dirty="0">
-                <a:solidFill>
-                  <a:srgbClr val="13507F"/>
-                </a:solidFill>
-                <a:latin typeface="Calibri" pitchFamily="34" charset="0"/>
-                <a:ea typeface="Calibri" pitchFamily="34" charset="-122"/>
-                <a:cs typeface="Calibri" pitchFamily="34" charset="-120"/>
-              </a:rPr>
-              <a:t>Circ. 22737</a:t>
-            </a:r>
-            <a:endParaRPr lang="en-US" sz="900" dirty="0"/>
-          </a:p>
-          <a:p>
-            <a:pPr marL="0" indent="0">
-              <a:spcAft>
-                <a:spcPts val="300"/>
-              </a:spcAft>
-              <a:buNone/>
-            </a:pPr>
-            <a:r>
-              <a:rPr lang="en-US" sz="900" b="1" dirty="0" err="1">
-                <a:solidFill>
-                  <a:srgbClr val="B86E00"/>
-                </a:solidFill>
-                <a:latin typeface="Calibri" pitchFamily="34" charset="0"/>
-                <a:ea typeface="Calibri" pitchFamily="34" charset="-122"/>
-                <a:cs typeface="Calibri" pitchFamily="34" charset="-120"/>
-              </a:rPr>
-              <a:t>Plazo</a:t>
-            </a:r>
-            <a:r>
-              <a:rPr lang="en-US" sz="900" b="1" dirty="0">
-                <a:solidFill>
-                  <a:srgbClr val="B86E00"/>
-                </a:solidFill>
-                <a:latin typeface="Calibri" pitchFamily="34" charset="0"/>
-                <a:ea typeface="Calibri" pitchFamily="34" charset="-122"/>
-                <a:cs typeface="Calibri" pitchFamily="34" charset="-120"/>
-              </a:rPr>
-              <a:t> 03/11/2026</a:t>
-            </a:r>
-          </a:p>
-          <a:p>
-            <a:pPr>
-              <a:spcAft>
-                <a:spcPts val="300"/>
-              </a:spcAft>
-            </a:pPr>
-            <a:r>
-              <a:rPr lang="en-US" sz="900" b="1" dirty="0">
-                <a:solidFill>
-                  <a:srgbClr val="0B2545"/>
-                </a:solidFill>
-                <a:latin typeface="Calibri" pitchFamily="34" charset="0"/>
-                <a:ea typeface="Calibri" pitchFamily="34" charset="-122"/>
-                <a:cs typeface="Calibri" pitchFamily="34" charset="-120"/>
-              </a:rPr>
-              <a:t>Riesgo Credito, Mercado y Liquidez  ·  </a:t>
-            </a:r>
-            <a:r>
-              <a:rPr lang="en-US" sz="800" dirty="0">
-                <a:solidFill>
-                  <a:srgbClr val="13507F"/>
-                </a:solidFill>
-                <a:latin typeface="Calibri" pitchFamily="34" charset="0"/>
-                <a:ea typeface="Calibri" pitchFamily="34" charset="-122"/>
-                <a:cs typeface="Calibri" pitchFamily="34" charset="-120"/>
-              </a:rPr>
-              <a:t>Circ. 22742</a:t>
-            </a:r>
-            <a:r>
-              <a:rPr lang="en-US" sz="900" b="1" dirty="0">
-                <a:solidFill>
-                  <a:srgbClr val="B86E00"/>
-                </a:solidFill>
-                <a:latin typeface="Calibri" pitchFamily="34" charset="0"/>
-                <a:ea typeface="Calibri" pitchFamily="34" charset="-122"/>
-                <a:cs typeface="Calibri" pitchFamily="34" charset="-120"/>
-              </a:rPr>
-              <a:t>   </a:t>
-            </a:r>
-            <a:r>
-              <a:rPr lang="en-US" sz="900" b="1" dirty="0" err="1">
-                <a:solidFill>
-                  <a:srgbClr val="B86E00"/>
-                </a:solidFill>
-                <a:latin typeface="Calibri" pitchFamily="34" charset="0"/>
-                <a:ea typeface="Calibri" pitchFamily="34" charset="-122"/>
-                <a:cs typeface="Calibri" pitchFamily="34" charset="-120"/>
-              </a:rPr>
-              <a:t>Inicio</a:t>
-            </a:r>
-            <a:r>
-              <a:rPr lang="en-US" sz="900" b="1" dirty="0">
-                <a:solidFill>
-                  <a:srgbClr val="B86E00"/>
-                </a:solidFill>
-                <a:latin typeface="Calibri" pitchFamily="34" charset="0"/>
-                <a:ea typeface="Calibri" pitchFamily="34" charset="-122"/>
-                <a:cs typeface="Calibri" pitchFamily="34" charset="-120"/>
-              </a:rPr>
-              <a:t> visita 09/10</a:t>
-            </a:r>
-            <a:endParaRPr lang="en-US" sz="900" dirty="0"/>
-          </a:p>
-          <a:p>
-            <a:pPr marL="0" indent="0">
-              <a:spcAft>
-                <a:spcPts val="300"/>
-              </a:spcAft>
-              <a:buNone/>
-            </a:pPr>
-            <a:endParaRPr lang="en-US" sz="900" dirty="0"/>
-          </a:p>
-        </p:txBody>
-      </p:sp>
-      <p:sp>
-        <p:nvSpPr>
-          <p:cNvPr id="14" name="Shape 11"/>
-          <p:cNvSpPr/>
-          <p:nvPr/>
-        </p:nvSpPr>
-        <p:spPr>
-          <a:xfrm>
-            <a:off x="7580376" y="1627632"/>
-            <a:ext cx="4151376" cy="1371600"/>
-          </a:xfrm>
-          <a:prstGeom prst="roundRect">
-            <a:avLst>
-              <a:gd name="adj" fmla="val 6667"/>
-            </a:avLst>
-          </a:prstGeom>
-          <a:solidFill>
-            <a:srgbClr val="EEF2F7"/>
-          </a:solidFill>
-          <a:ln w="12700">
-            <a:solidFill>
-              <a:srgbClr val="EEF2F7"/>
-            </a:solidFill>
-            <a:prstDash val="solid"/>
-          </a:ln>
-        </p:spPr>
-        <p:txBody>
-          <a:bodyPr/>
-          <a:lstStyle/>
-          <a:p>
-            <a:endParaRPr lang="es-SV"/>
-          </a:p>
-        </p:txBody>
-      </p:sp>
-      <p:sp>
-        <p:nvSpPr>
-          <p:cNvPr id="15" name="Text 12"/>
-          <p:cNvSpPr txBox="1"/>
-          <p:nvPr/>
-        </p:nvSpPr>
-        <p:spPr>
-          <a:xfrm>
-            <a:off x="7744968" y="1700784"/>
-            <a:ext cx="3858768" cy="1225296"/>
-          </a:xfrm>
-          <a:prstGeom prst="rect">
-            <a:avLst/>
-          </a:prstGeom>
-          <a:noFill/>
-          <a:ln/>
-        </p:spPr>
-        <p:txBody>
-          <a:bodyPr wrap="square" lIns="0" tIns="0" rIns="0" bIns="0" rtlCol="0" anchor="ctr"/>
-          <a:lstStyle/>
-          <a:p>
-            <a:pPr marL="152400" indent="-152400">
-              <a:spcAft>
-                <a:spcPts val="200"/>
-              </a:spcAft>
-              <a:buSzPct val="100000"/>
-              <a:buChar char="•"/>
-            </a:pPr>
-            <a:r>
-              <a:rPr lang="en-US" sz="1050" dirty="0">
-                <a:solidFill>
-                  <a:srgbClr val="1B2733"/>
-                </a:solidFill>
-                <a:latin typeface="Calibri" pitchFamily="34" charset="0"/>
-                <a:ea typeface="Calibri" pitchFamily="34" charset="-122"/>
-                <a:cs typeface="Calibri" pitchFamily="34" charset="-120"/>
-              </a:rPr>
-              <a:t>Requerimiento según nota DS-SABAO-BCS-BC-22741</a:t>
-            </a:r>
-            <a:endParaRPr lang="en-US" sz="1050" dirty="0"/>
-          </a:p>
-          <a:p>
-            <a:pPr marL="152400" indent="-152400">
-              <a:spcAft>
-                <a:spcPts val="200"/>
-              </a:spcAft>
-              <a:buSzPct val="100000"/>
-              <a:buChar char="•"/>
-            </a:pPr>
-            <a:r>
-              <a:rPr lang="en-US" sz="1050" dirty="0">
-                <a:solidFill>
-                  <a:srgbClr val="1B2733"/>
-                </a:solidFill>
-                <a:latin typeface="Calibri" pitchFamily="34" charset="0"/>
-                <a:ea typeface="Calibri" pitchFamily="34" charset="-122"/>
-                <a:cs typeface="Calibri" pitchFamily="34" charset="-120"/>
-              </a:rPr>
-              <a:t>Requerimiento según nota DS-SABAO-BCS-BC-23486</a:t>
-            </a:r>
-            <a:endParaRPr lang="en-US" sz="1050" dirty="0"/>
-          </a:p>
-          <a:p>
-            <a:pPr marL="152400" indent="-152400">
-              <a:spcAft>
-                <a:spcPts val="200"/>
-              </a:spcAft>
-              <a:buSzPct val="100000"/>
-              <a:buChar char="•"/>
-            </a:pPr>
-            <a:r>
-              <a:rPr lang="en-US" sz="1050" dirty="0">
-                <a:solidFill>
-                  <a:srgbClr val="1B2733"/>
-                </a:solidFill>
-                <a:latin typeface="Calibri" pitchFamily="34" charset="0"/>
-                <a:ea typeface="Calibri" pitchFamily="34" charset="-122"/>
-                <a:cs typeface="Calibri" pitchFamily="34" charset="-120"/>
-              </a:rPr>
-              <a:t>Presentación resultados preliminares de Gestión de </a:t>
-            </a:r>
-            <a:r>
-              <a:rPr lang="en-US" sz="1050" dirty="0" err="1">
-                <a:solidFill>
-                  <a:srgbClr val="1B2733"/>
-                </a:solidFill>
-                <a:latin typeface="Calibri" pitchFamily="34" charset="0"/>
-                <a:ea typeface="Calibri" pitchFamily="34" charset="-122"/>
-                <a:cs typeface="Calibri" pitchFamily="34" charset="-120"/>
-              </a:rPr>
-              <a:t>Riesgos</a:t>
-            </a:r>
-            <a:r>
-              <a:rPr lang="en-US" sz="1050" dirty="0">
-                <a:solidFill>
-                  <a:srgbClr val="1B2733"/>
-                </a:solidFill>
-                <a:latin typeface="Calibri" pitchFamily="34" charset="0"/>
-                <a:ea typeface="Calibri" pitchFamily="34" charset="-122"/>
-                <a:cs typeface="Calibri" pitchFamily="34" charset="-120"/>
-              </a:rPr>
-              <a:t> </a:t>
-            </a:r>
-            <a:r>
-              <a:rPr lang="en-US" sz="1050" dirty="0" err="1">
-                <a:solidFill>
-                  <a:srgbClr val="1B2733"/>
-                </a:solidFill>
-                <a:latin typeface="Calibri" pitchFamily="34" charset="0"/>
-                <a:ea typeface="Calibri" pitchFamily="34" charset="-122"/>
-                <a:cs typeface="Calibri" pitchFamily="34" charset="-120"/>
-              </a:rPr>
-              <a:t>Específicos</a:t>
-            </a:r>
-            <a:endParaRPr lang="en-US" sz="1050" dirty="0"/>
-          </a:p>
-          <a:p>
-            <a:pPr marL="152400" indent="-152400">
-              <a:spcAft>
-                <a:spcPts val="200"/>
-              </a:spcAft>
-              <a:buSzPct val="100000"/>
-              <a:buChar char="•"/>
-            </a:pPr>
-            <a:r>
-              <a:rPr lang="en-US" sz="1050" dirty="0">
-                <a:solidFill>
-                  <a:srgbClr val="1B2733"/>
-                </a:solidFill>
-                <a:latin typeface="Calibri" pitchFamily="34" charset="0"/>
-                <a:ea typeface="Calibri" pitchFamily="34" charset="-122"/>
-                <a:cs typeface="Calibri" pitchFamily="34" charset="-120"/>
-              </a:rPr>
-              <a:t>Presentación visita de supervisión gobierno corporativo</a:t>
-            </a:r>
-            <a:endParaRPr lang="en-US" sz="1050" dirty="0"/>
-          </a:p>
-          <a:p>
-            <a:pPr marL="152400" indent="-152400">
-              <a:spcAft>
-                <a:spcPts val="200"/>
-              </a:spcAft>
-              <a:buSzPct val="100000"/>
-              <a:buChar char="•"/>
-            </a:pPr>
-            <a:r>
-              <a:rPr lang="en-US" sz="1050" dirty="0">
-                <a:solidFill>
-                  <a:srgbClr val="1B2733"/>
-                </a:solidFill>
-                <a:latin typeface="Calibri" pitchFamily="34" charset="0"/>
-                <a:ea typeface="Calibri" pitchFamily="34" charset="-122"/>
-                <a:cs typeface="Calibri" pitchFamily="34" charset="-120"/>
-              </a:rPr>
-              <a:t>Visita al regulador – fecha de visita 15/10/2026</a:t>
-            </a:r>
-            <a:endParaRPr lang="en-US" sz="1050" dirty="0"/>
-          </a:p>
-        </p:txBody>
-      </p:sp>
-      <p:sp>
-        <p:nvSpPr>
           <p:cNvPr id="16" name="Shape 13"/>
           <p:cNvSpPr/>
           <p:nvPr/>
         </p:nvSpPr>
         <p:spPr>
           <a:xfrm>
-            <a:off x="457200" y="3081528"/>
-            <a:ext cx="2697480" cy="1152144"/>
+            <a:off x="3310128" y="1234440"/>
+            <a:ext cx="2715768" cy="1097280"/>
           </a:xfrm>
           <a:prstGeom prst="roundRect">
             <a:avLst>
@@ -1904,7 +1285,7 @@
         </p:nvSpPr>
         <p:spPr>
           <a:xfrm>
-            <a:off x="621792" y="3273552"/>
+            <a:off x="3474720" y="1399032"/>
             <a:ext cx="384048" cy="384048"/>
           </a:xfrm>
           <a:prstGeom prst="ellipse">
@@ -1937,14 +1318,14 @@
           <p:nvPr/>
         </p:nvPicPr>
         <p:blipFill>
-          <a:blip r:embed="rId4"/>
+          <a:blip r:embed="rId6"/>
           <a:stretch>
             <a:fillRect/>
           </a:stretch>
         </p:blipFill>
         <p:spPr>
           <a:xfrm>
-            <a:off x="722376" y="3374136"/>
+            <a:off x="3575304" y="1499616"/>
             <a:ext cx="182880" cy="182880"/>
           </a:xfrm>
           <a:prstGeom prst="rect">
@@ -1960,7 +1341,7 @@
         </p:nvSpPr>
         <p:spPr>
           <a:xfrm>
-            <a:off x="1143000" y="3182112"/>
+            <a:off x="3995928" y="1307592"/>
             <a:ext cx="1920240" cy="566928"/>
           </a:xfrm>
           <a:prstGeom prst="rect">
@@ -2003,7 +1384,7 @@
         </p:nvSpPr>
         <p:spPr>
           <a:xfrm>
-            <a:off x="621792" y="3712464"/>
+            <a:off x="3474720" y="1837944"/>
             <a:ext cx="2103120" cy="182880"/>
           </a:xfrm>
           <a:prstGeom prst="rect">
@@ -2046,7 +1427,7 @@
         </p:nvSpPr>
         <p:spPr>
           <a:xfrm>
-            <a:off x="621792" y="3931920"/>
+            <a:off x="3474720" y="2057400"/>
             <a:ext cx="1828800" cy="100584"/>
           </a:xfrm>
           <a:prstGeom prst="roundRect">
@@ -2086,8 +1467,8 @@
         </p:nvSpPr>
         <p:spPr>
           <a:xfrm>
-            <a:off x="621792" y="3931920"/>
-            <a:ext cx="1700784" cy="100584"/>
+            <a:off x="3474720" y="2057400"/>
+            <a:ext cx="1792224" cy="100584"/>
           </a:xfrm>
           <a:prstGeom prst="roundRect">
             <a:avLst>
@@ -2126,7 +1507,7 @@
         </p:nvSpPr>
         <p:spPr>
           <a:xfrm>
-            <a:off x="2496312" y="3822192"/>
+            <a:off x="5349240" y="1947672"/>
             <a:ext cx="548640" cy="310896"/>
           </a:xfrm>
           <a:prstGeom prst="rect">
@@ -2151,7 +1532,7 @@
                 <a:ea typeface="Calibri" pitchFamily="34" charset="-122"/>
                 <a:cs typeface="Calibri" pitchFamily="34" charset="-120"/>
               </a:rPr>
-              <a:t>96%</a:t>
+              <a:t>98%</a:t>
             </a:r>
             <a:endParaRPr lang="en-US" sz="1400" dirty="0"/>
           </a:p>
@@ -2159,273 +1540,14 @@
       </p:sp>
       <p:sp>
         <p:nvSpPr>
-          <p:cNvPr id="24" name="Shape 20"/>
-          <p:cNvSpPr/>
-          <p:nvPr/>
-        </p:nvSpPr>
-        <p:spPr>
-          <a:xfrm>
-            <a:off x="3291840" y="3081528"/>
-            <a:ext cx="4151376" cy="1152144"/>
-          </a:xfrm>
-          <a:prstGeom prst="roundRect">
-            <a:avLst>
-              <a:gd name="adj" fmla="val 7937"/>
-            </a:avLst>
-          </a:prstGeom>
-          <a:solidFill>
-            <a:srgbClr val="EEF2F7"/>
-          </a:solidFill>
-          <a:ln w="12700">
-            <a:solidFill>
-              <a:srgbClr val="EEF2F7"/>
-            </a:solidFill>
-            <a:prstDash val="solid"/>
-          </a:ln>
-        </p:spPr>
-        <p:txBody>
-          <a:bodyPr/>
-          <a:lstStyle/>
-          <a:p>
-            <a:endParaRPr lang="es-SV"/>
-          </a:p>
-        </p:txBody>
-      </p:sp>
-      <p:sp>
-        <p:nvSpPr>
-          <p:cNvPr id="25" name="Text 21"/>
-          <p:cNvSpPr txBox="1"/>
-          <p:nvPr/>
-        </p:nvSpPr>
-        <p:spPr>
-          <a:xfrm>
-            <a:off x="3456432" y="3154680"/>
-            <a:ext cx="3858768" cy="1005840"/>
-          </a:xfrm>
-          <a:prstGeom prst="rect">
-            <a:avLst/>
-          </a:prstGeom>
-          <a:noFill/>
-          <a:ln/>
-        </p:spPr>
-        <p:txBody>
-          <a:bodyPr wrap="square" lIns="0" tIns="0" rIns="0" bIns="0" rtlCol="0" anchor="ctr"/>
-          <a:lstStyle/>
-          <a:p>
-            <a:pPr marL="152400" indent="-152400">
-              <a:spcAft>
-                <a:spcPts val="200"/>
-              </a:spcAft>
-              <a:buSzPct val="100000"/>
-              <a:buChar char="•"/>
-            </a:pPr>
-            <a:r>
-              <a:rPr lang="en-US" sz="1050" dirty="0">
-                <a:solidFill>
-                  <a:srgbClr val="1B2733"/>
-                </a:solidFill>
-                <a:latin typeface="Calibri" pitchFamily="34" charset="0"/>
-                <a:ea typeface="Calibri" pitchFamily="34" charset="-122"/>
-                <a:cs typeface="Calibri" pitchFamily="34" charset="-120"/>
-              </a:rPr>
-              <a:t>Capacitación y Examen GIR 2026</a:t>
-            </a:r>
-            <a:endParaRPr lang="en-US" sz="1050" dirty="0"/>
-          </a:p>
-          <a:p>
-            <a:pPr marL="152400" indent="-152400">
-              <a:spcAft>
-                <a:spcPts val="200"/>
-              </a:spcAft>
-              <a:buSzPct val="100000"/>
-              <a:buChar char="•"/>
-            </a:pPr>
-            <a:r>
-              <a:rPr lang="en-US" sz="1050" dirty="0">
-                <a:solidFill>
-                  <a:srgbClr val="1B2733"/>
-                </a:solidFill>
-                <a:latin typeface="Calibri" pitchFamily="34" charset="0"/>
-                <a:ea typeface="Calibri" pitchFamily="34" charset="-122"/>
-                <a:cs typeface="Calibri" pitchFamily="34" charset="-120"/>
-              </a:rPr>
-              <a:t>Actualización Matriz BIA</a:t>
-            </a:r>
-            <a:endParaRPr lang="en-US" sz="1050" dirty="0"/>
-          </a:p>
-          <a:p>
-            <a:pPr marL="152400" indent="-152400">
-              <a:spcAft>
-                <a:spcPts val="200"/>
-              </a:spcAft>
-              <a:buSzPct val="100000"/>
-              <a:buChar char="•"/>
-            </a:pPr>
-            <a:r>
-              <a:rPr lang="en-US" sz="1050" dirty="0">
-                <a:solidFill>
-                  <a:srgbClr val="1B2733"/>
-                </a:solidFill>
-                <a:latin typeface="Calibri" pitchFamily="34" charset="0"/>
-                <a:ea typeface="Calibri" pitchFamily="34" charset="-122"/>
-                <a:cs typeface="Calibri" pitchFamily="34" charset="-120"/>
-              </a:rPr>
-              <a:t>Segunda prueba de continuidad de negocio</a:t>
-            </a:r>
-            <a:endParaRPr lang="en-US" sz="1050" dirty="0"/>
-          </a:p>
-        </p:txBody>
-      </p:sp>
-      <p:sp>
-        <p:nvSpPr>
-          <p:cNvPr id="26" name="Shape 22"/>
-          <p:cNvSpPr/>
-          <p:nvPr/>
-        </p:nvSpPr>
-        <p:spPr>
-          <a:xfrm>
-            <a:off x="7580376" y="3081528"/>
-            <a:ext cx="4151376" cy="1152144"/>
-          </a:xfrm>
-          <a:prstGeom prst="roundRect">
-            <a:avLst>
-              <a:gd name="adj" fmla="val 7937"/>
-            </a:avLst>
-          </a:prstGeom>
-          <a:solidFill>
-            <a:srgbClr val="EEF2F7"/>
-          </a:solidFill>
-          <a:ln w="12700">
-            <a:solidFill>
-              <a:srgbClr val="EEF2F7"/>
-            </a:solidFill>
-            <a:prstDash val="solid"/>
-          </a:ln>
-        </p:spPr>
-        <p:txBody>
-          <a:bodyPr/>
-          <a:lstStyle/>
-          <a:p>
-            <a:endParaRPr lang="es-SV"/>
-          </a:p>
-        </p:txBody>
-      </p:sp>
-      <p:sp>
-        <p:nvSpPr>
-          <p:cNvPr id="27" name="Text 23"/>
-          <p:cNvSpPr txBox="1"/>
-          <p:nvPr/>
-        </p:nvSpPr>
-        <p:spPr>
-          <a:xfrm>
-            <a:off x="7744968" y="3154680"/>
-            <a:ext cx="3858768" cy="1005840"/>
-          </a:xfrm>
-          <a:prstGeom prst="rect">
-            <a:avLst/>
-          </a:prstGeom>
-          <a:noFill/>
-          <a:ln/>
-        </p:spPr>
-        <p:txBody>
-          <a:bodyPr wrap="square" lIns="0" tIns="0" rIns="0" bIns="0" rtlCol="0" anchor="ctr"/>
-          <a:lstStyle/>
-          <a:p>
-            <a:pPr marL="152400" indent="-152400">
-              <a:spcAft>
-                <a:spcPts val="200"/>
-              </a:spcAft>
-              <a:buSzPct val="100000"/>
-              <a:buChar char="•"/>
-            </a:pPr>
-            <a:r>
-              <a:rPr lang="en-US" sz="1050" dirty="0">
-                <a:solidFill>
-                  <a:srgbClr val="1B2733"/>
-                </a:solidFill>
-                <a:latin typeface="Calibri" pitchFamily="34" charset="0"/>
-                <a:ea typeface="Calibri" pitchFamily="34" charset="-122"/>
-                <a:cs typeface="Calibri" pitchFamily="34" charset="-120"/>
-              </a:rPr>
-              <a:t>Capacitación de GIR 2026</a:t>
-            </a:r>
-            <a:endParaRPr lang="en-US" sz="1050" dirty="0"/>
-          </a:p>
-          <a:p>
-            <a:pPr marL="152400" indent="-152400">
-              <a:spcAft>
-                <a:spcPts val="200"/>
-              </a:spcAft>
-              <a:buSzPct val="100000"/>
-              <a:buChar char="•"/>
-            </a:pPr>
-            <a:r>
-              <a:rPr lang="en-US" sz="1050" dirty="0">
-                <a:solidFill>
-                  <a:srgbClr val="1B2733"/>
-                </a:solidFill>
-                <a:latin typeface="Calibri" pitchFamily="34" charset="0"/>
-                <a:ea typeface="Calibri" pitchFamily="34" charset="-122"/>
-                <a:cs typeface="Calibri" pitchFamily="34" charset="-120"/>
-              </a:rPr>
-              <a:t>Informe de segunda prueba de Continuidad del Negocio realizada el 01.10.2026</a:t>
-            </a:r>
-            <a:endParaRPr lang="en-US" sz="1050" dirty="0"/>
-          </a:p>
-          <a:p>
-            <a:pPr marL="152400" indent="-152400">
-              <a:spcAft>
-                <a:spcPts val="200"/>
-              </a:spcAft>
-              <a:buSzPct val="100000"/>
-              <a:buChar char="•"/>
-            </a:pPr>
-            <a:r>
-              <a:rPr lang="en-US" sz="1050" dirty="0">
-                <a:solidFill>
-                  <a:srgbClr val="1B2733"/>
-                </a:solidFill>
-                <a:latin typeface="Calibri" pitchFamily="34" charset="0"/>
-                <a:ea typeface="Calibri" pitchFamily="34" charset="-122"/>
-                <a:cs typeface="Calibri" pitchFamily="34" charset="-120"/>
-              </a:rPr>
-              <a:t>Seguimiento planes de acción Matriz de Riesgos Institucional 2026</a:t>
-            </a:r>
-            <a:endParaRPr lang="en-US" sz="1050" dirty="0"/>
-          </a:p>
-          <a:p>
-            <a:pPr marL="152400" indent="-152400">
-              <a:spcAft>
-                <a:spcPts val="200"/>
-              </a:spcAft>
-              <a:buSzPct val="100000"/>
-              <a:buChar char="•"/>
-            </a:pPr>
-            <a:r>
-              <a:rPr lang="en-US" sz="1050" dirty="0">
-                <a:solidFill>
-                  <a:srgbClr val="1B2733"/>
-                </a:solidFill>
-                <a:latin typeface="Calibri" pitchFamily="34" charset="0"/>
-                <a:ea typeface="Calibri" pitchFamily="34" charset="-122"/>
-                <a:cs typeface="Calibri" pitchFamily="34" charset="-120"/>
-              </a:rPr>
-              <a:t>Seguimiento eventos de riesgos por caídas de TC 25.09.2026 y Orion 26.09.2026</a:t>
-            </a:r>
-            <a:endParaRPr lang="en-US" sz="1050" dirty="0"/>
-          </a:p>
-        </p:txBody>
-      </p:sp>
-      <p:sp>
-        <p:nvSpPr>
           <p:cNvPr id="28" name="Shape 24"/>
           <p:cNvSpPr/>
           <p:nvPr/>
         </p:nvSpPr>
         <p:spPr>
           <a:xfrm>
-            <a:off x="457200" y="4315968"/>
-            <a:ext cx="2697480" cy="1188720"/>
+            <a:off x="6163056" y="1234440"/>
+            <a:ext cx="2715768" cy="1097280"/>
           </a:xfrm>
           <a:prstGeom prst="roundRect">
             <a:avLst>
@@ -2489,7 +1611,7 @@
         </p:nvSpPr>
         <p:spPr>
           <a:xfrm>
-            <a:off x="621792" y="4507992"/>
+            <a:off x="6327648" y="1380744"/>
             <a:ext cx="384048" cy="384048"/>
           </a:xfrm>
           <a:prstGeom prst="ellipse">
@@ -2522,14 +1644,14 @@
           <p:nvPr/>
         </p:nvPicPr>
         <p:blipFill>
-          <a:blip r:embed="rId5"/>
+          <a:blip r:embed="rId7"/>
           <a:stretch>
             <a:fillRect/>
           </a:stretch>
         </p:blipFill>
         <p:spPr>
           <a:xfrm>
-            <a:off x="722376" y="4608576"/>
+            <a:off x="6428232" y="1481328"/>
             <a:ext cx="182880" cy="182880"/>
           </a:xfrm>
           <a:prstGeom prst="rect">
@@ -2545,7 +1667,7 @@
         </p:nvSpPr>
         <p:spPr>
           <a:xfrm>
-            <a:off x="1143000" y="4416552"/>
+            <a:off x="6848856" y="1289304"/>
             <a:ext cx="1920240" cy="566928"/>
           </a:xfrm>
           <a:prstGeom prst="rect">
@@ -2588,7 +1710,7 @@
         </p:nvSpPr>
         <p:spPr>
           <a:xfrm>
-            <a:off x="621792" y="4946904"/>
+            <a:off x="6327648" y="1819656"/>
             <a:ext cx="2103120" cy="182880"/>
           </a:xfrm>
           <a:prstGeom prst="rect">
@@ -2631,7 +1753,7 @@
         </p:nvSpPr>
         <p:spPr>
           <a:xfrm>
-            <a:off x="621792" y="5166360"/>
+            <a:off x="6327648" y="2039112"/>
             <a:ext cx="1828800" cy="100584"/>
           </a:xfrm>
           <a:prstGeom prst="roundRect">
@@ -2671,7 +1793,7 @@
         </p:nvSpPr>
         <p:spPr>
           <a:xfrm>
-            <a:off x="621792" y="5166360"/>
+            <a:off x="6327648" y="2039112"/>
             <a:ext cx="1463040" cy="100584"/>
           </a:xfrm>
           <a:prstGeom prst="roundRect">
@@ -2711,7 +1833,7 @@
         </p:nvSpPr>
         <p:spPr>
           <a:xfrm>
-            <a:off x="2496312" y="5056632"/>
+            <a:off x="8202168" y="1929384"/>
             <a:ext cx="548640" cy="310896"/>
           </a:xfrm>
           <a:prstGeom prst="rect">
@@ -2744,327 +1866,14 @@
       </p:sp>
       <p:sp>
         <p:nvSpPr>
-          <p:cNvPr id="32" name="Shape 27"/>
-          <p:cNvSpPr/>
-          <p:nvPr/>
-        </p:nvSpPr>
-        <p:spPr>
-          <a:xfrm>
-            <a:off x="3291840" y="4315968"/>
-            <a:ext cx="4151376" cy="1188720"/>
-          </a:xfrm>
-          <a:prstGeom prst="roundRect">
-            <a:avLst>
-              <a:gd name="adj" fmla="val 7692"/>
-            </a:avLst>
-          </a:prstGeom>
-          <a:solidFill>
-            <a:srgbClr val="EEF2F7"/>
-          </a:solidFill>
-          <a:ln w="12700">
-            <a:solidFill>
-              <a:srgbClr val="EEF2F7"/>
-            </a:solidFill>
-            <a:prstDash val="solid"/>
-          </a:ln>
-        </p:spPr>
-        <p:txBody>
-          <a:bodyPr/>
-          <a:lstStyle/>
-          <a:p>
-            <a:endParaRPr lang="es-SV"/>
-          </a:p>
-        </p:txBody>
-      </p:sp>
-      <p:sp>
-        <p:nvSpPr>
-          <p:cNvPr id="33" name="Text 28"/>
-          <p:cNvSpPr txBox="1"/>
-          <p:nvPr/>
-        </p:nvSpPr>
-        <p:spPr>
-          <a:xfrm>
-            <a:off x="3456432" y="4389120"/>
-            <a:ext cx="3858768" cy="1042416"/>
-          </a:xfrm>
-          <a:prstGeom prst="rect">
-            <a:avLst/>
-          </a:prstGeom>
-          <a:noFill/>
-          <a:ln/>
-        </p:spPr>
-        <p:txBody>
-          <a:bodyPr wrap="square" lIns="0" tIns="0" rIns="0" bIns="0" rtlCol="0" anchor="ctr"/>
-          <a:lstStyle/>
-          <a:p>
-            <a:pPr marL="152400" indent="-152400">
-              <a:spcAft>
-                <a:spcPts val="200"/>
-              </a:spcAft>
-              <a:buSzPct val="100000"/>
-              <a:buChar char="•"/>
-            </a:pPr>
-            <a:r>
-              <a:rPr lang="en-US" sz="1050" dirty="0">
-                <a:solidFill>
-                  <a:srgbClr val="1B2733"/>
-                </a:solidFill>
-                <a:latin typeface="Calibri" pitchFamily="34" charset="0"/>
-                <a:ea typeface="Calibri" pitchFamily="34" charset="-122"/>
-                <a:cs typeface="Calibri" pitchFamily="34" charset="-120"/>
-              </a:rPr>
-              <a:t>Revisión de Política de Avalúos</a:t>
-            </a:r>
-            <a:endParaRPr lang="en-US" sz="1050" dirty="0"/>
-          </a:p>
-          <a:p>
-            <a:pPr marL="152400" indent="-152400">
-              <a:spcAft>
-                <a:spcPts val="200"/>
-              </a:spcAft>
-              <a:buSzPct val="100000"/>
-              <a:buChar char="•"/>
-            </a:pPr>
-            <a:r>
-              <a:rPr lang="en-US" sz="1050" dirty="0">
-                <a:solidFill>
-                  <a:srgbClr val="1B2733"/>
-                </a:solidFill>
-                <a:latin typeface="Calibri" pitchFamily="34" charset="0"/>
-                <a:ea typeface="Calibri" pitchFamily="34" charset="-122"/>
-                <a:cs typeface="Calibri" pitchFamily="34" charset="-120"/>
-              </a:rPr>
-              <a:t>Revisión de Procedimientos de Administración de Avalúos</a:t>
-            </a:r>
-            <a:endParaRPr lang="en-US" sz="1050" dirty="0"/>
-          </a:p>
-          <a:p>
-            <a:pPr marL="152400" indent="-152400">
-              <a:spcAft>
-                <a:spcPts val="200"/>
-              </a:spcAft>
-              <a:buSzPct val="100000"/>
-              <a:buChar char="•"/>
-            </a:pPr>
-            <a:r>
-              <a:rPr lang="en-US" sz="1050" dirty="0">
-                <a:solidFill>
-                  <a:srgbClr val="1B2733"/>
-                </a:solidFill>
-                <a:latin typeface="Calibri" pitchFamily="34" charset="0"/>
-                <a:ea typeface="Calibri" pitchFamily="34" charset="-122"/>
-                <a:cs typeface="Calibri" pitchFamily="34" charset="-120"/>
-              </a:rPr>
-              <a:t>Revisión de Perfil de Revisor</a:t>
-            </a:r>
-            <a:endParaRPr lang="en-US" sz="1050" dirty="0"/>
-          </a:p>
-        </p:txBody>
-      </p:sp>
-      <p:sp>
-        <p:nvSpPr>
-          <p:cNvPr id="34" name="Shape 29"/>
-          <p:cNvSpPr/>
-          <p:nvPr/>
-        </p:nvSpPr>
-        <p:spPr>
-          <a:xfrm>
-            <a:off x="7580376" y="4315968"/>
-            <a:ext cx="4151376" cy="1188720"/>
-          </a:xfrm>
-          <a:prstGeom prst="roundRect">
-            <a:avLst>
-              <a:gd name="adj" fmla="val 7692"/>
-            </a:avLst>
-          </a:prstGeom>
-          <a:solidFill>
-            <a:srgbClr val="EEF2F7"/>
-          </a:solidFill>
-          <a:ln w="12700">
-            <a:solidFill>
-              <a:srgbClr val="EEF2F7"/>
-            </a:solidFill>
-            <a:prstDash val="solid"/>
-          </a:ln>
-        </p:spPr>
-        <p:txBody>
-          <a:bodyPr/>
-          <a:lstStyle/>
-          <a:p>
-            <a:endParaRPr lang="es-SV"/>
-          </a:p>
-        </p:txBody>
-      </p:sp>
-      <p:sp>
-        <p:nvSpPr>
-          <p:cNvPr id="35" name="Text 30"/>
-          <p:cNvSpPr txBox="1"/>
-          <p:nvPr/>
-        </p:nvSpPr>
-        <p:spPr>
-          <a:xfrm>
-            <a:off x="7744968" y="4389120"/>
-            <a:ext cx="3858768" cy="1042416"/>
-          </a:xfrm>
-          <a:prstGeom prst="rect">
-            <a:avLst/>
-          </a:prstGeom>
-          <a:noFill/>
-          <a:ln/>
-        </p:spPr>
-        <p:txBody>
-          <a:bodyPr wrap="square" lIns="0" tIns="0" rIns="0" bIns="0" rtlCol="0" anchor="ctr"/>
-          <a:lstStyle/>
-          <a:p>
-            <a:pPr marL="152400" indent="-152400">
-              <a:spcAft>
-                <a:spcPts val="200"/>
-              </a:spcAft>
-              <a:buSzPct val="100000"/>
-              <a:buChar char="•"/>
-            </a:pPr>
-            <a:r>
-              <a:rPr lang="en-US" sz="1050" dirty="0">
-                <a:solidFill>
-                  <a:srgbClr val="1B2733"/>
-                </a:solidFill>
-                <a:latin typeface="Calibri" pitchFamily="34" charset="0"/>
-                <a:ea typeface="Calibri" pitchFamily="34" charset="-122"/>
-                <a:cs typeface="Calibri" pitchFamily="34" charset="-120"/>
-              </a:rPr>
-              <a:t>Asignación a perito valuador</a:t>
-            </a:r>
-            <a:endParaRPr lang="en-US" sz="1050" dirty="0"/>
-          </a:p>
-          <a:p>
-            <a:pPr marL="152400" indent="-152400">
-              <a:spcAft>
-                <a:spcPts val="200"/>
-              </a:spcAft>
-              <a:buSzPct val="100000"/>
-              <a:buChar char="•"/>
-            </a:pPr>
-            <a:r>
-              <a:rPr lang="en-US" sz="1050" dirty="0">
-                <a:solidFill>
-                  <a:srgbClr val="1B2733"/>
-                </a:solidFill>
-                <a:latin typeface="Calibri" pitchFamily="34" charset="0"/>
-                <a:ea typeface="Calibri" pitchFamily="34" charset="-122"/>
-                <a:cs typeface="Calibri" pitchFamily="34" charset="-120"/>
-              </a:rPr>
-              <a:t>Descargo de avalúo anterior y documento mutuo hipotecario</a:t>
-            </a:r>
-            <a:endParaRPr lang="en-US" sz="1050" dirty="0"/>
-          </a:p>
-          <a:p>
-            <a:pPr marL="152400" indent="-152400">
-              <a:spcAft>
-                <a:spcPts val="200"/>
-              </a:spcAft>
-              <a:buSzPct val="100000"/>
-              <a:buChar char="•"/>
-            </a:pPr>
-            <a:r>
-              <a:rPr lang="en-US" sz="1050" dirty="0">
-                <a:solidFill>
-                  <a:srgbClr val="1B2733"/>
-                </a:solidFill>
-                <a:latin typeface="Calibri" pitchFamily="34" charset="0"/>
-                <a:ea typeface="Calibri" pitchFamily="34" charset="-122"/>
-                <a:cs typeface="Calibri" pitchFamily="34" charset="-120"/>
-              </a:rPr>
-              <a:t>Elaboración de acta de sesión de fecha 29/08/2026</a:t>
-            </a:r>
-            <a:endParaRPr lang="en-US" sz="1050" dirty="0"/>
-          </a:p>
-          <a:p>
-            <a:pPr marL="152400" indent="-152400">
-              <a:spcAft>
-                <a:spcPts val="200"/>
-              </a:spcAft>
-              <a:buSzPct val="100000"/>
-              <a:buChar char="•"/>
-            </a:pPr>
-            <a:r>
-              <a:rPr lang="en-US" sz="1050" dirty="0">
-                <a:solidFill>
-                  <a:srgbClr val="1B2733"/>
-                </a:solidFill>
-                <a:latin typeface="Calibri" pitchFamily="34" charset="0"/>
-                <a:ea typeface="Calibri" pitchFamily="34" charset="-122"/>
-                <a:cs typeface="Calibri" pitchFamily="34" charset="-120"/>
-              </a:rPr>
-              <a:t>Actualización de política de servicios tercerizados</a:t>
-            </a:r>
-            <a:endParaRPr lang="en-US" sz="1050" dirty="0"/>
-          </a:p>
-          <a:p>
-            <a:pPr marL="152400" indent="-152400">
-              <a:spcAft>
-                <a:spcPts val="200"/>
-              </a:spcAft>
-              <a:buSzPct val="100000"/>
-              <a:buChar char="•"/>
-            </a:pPr>
-            <a:r>
-              <a:rPr lang="en-US" sz="1050" dirty="0" err="1">
-                <a:solidFill>
-                  <a:srgbClr val="1B2733"/>
-                </a:solidFill>
-                <a:latin typeface="Calibri" pitchFamily="34" charset="0"/>
-                <a:ea typeface="Calibri" pitchFamily="34" charset="-122"/>
-                <a:cs typeface="Calibri" pitchFamily="34" charset="-120"/>
-              </a:rPr>
-              <a:t>Actualización</a:t>
-            </a:r>
-            <a:r>
-              <a:rPr lang="en-US" sz="1050" dirty="0">
-                <a:solidFill>
-                  <a:srgbClr val="1B2733"/>
-                </a:solidFill>
-                <a:latin typeface="Calibri" pitchFamily="34" charset="0"/>
-                <a:ea typeface="Calibri" pitchFamily="34" charset="-122"/>
-                <a:cs typeface="Calibri" pitchFamily="34" charset="-120"/>
-              </a:rPr>
-              <a:t> Informe </a:t>
-            </a:r>
-            <a:r>
-              <a:rPr lang="en-US" sz="1050" dirty="0" err="1">
-                <a:solidFill>
-                  <a:srgbClr val="1B2733"/>
-                </a:solidFill>
-                <a:latin typeface="Calibri" pitchFamily="34" charset="0"/>
-                <a:ea typeface="Calibri" pitchFamily="34" charset="-122"/>
-                <a:cs typeface="Calibri" pitchFamily="34" charset="-120"/>
-              </a:rPr>
-              <a:t>Relativo</a:t>
-            </a:r>
-            <a:r>
-              <a:rPr lang="en-US" sz="1050" dirty="0">
-                <a:solidFill>
-                  <a:srgbClr val="1B2733"/>
-                </a:solidFill>
-                <a:latin typeface="Calibri" pitchFamily="34" charset="0"/>
-                <a:ea typeface="Calibri" pitchFamily="34" charset="-122"/>
-                <a:cs typeface="Calibri" pitchFamily="34" charset="-120"/>
-              </a:rPr>
-              <a:t> a Comites</a:t>
-            </a:r>
-            <a:endParaRPr lang="en-US" sz="1050" dirty="0"/>
-          </a:p>
-        </p:txBody>
-      </p:sp>
-      <p:sp>
-        <p:nvSpPr>
           <p:cNvPr id="36" name="Shape 31"/>
           <p:cNvSpPr/>
           <p:nvPr/>
         </p:nvSpPr>
         <p:spPr>
           <a:xfrm>
-            <a:off x="457200" y="5586984"/>
-            <a:ext cx="2697480" cy="896112"/>
+            <a:off x="9015984" y="1234440"/>
+            <a:ext cx="2715768" cy="1097280"/>
           </a:xfrm>
           <a:prstGeom prst="roundRect">
             <a:avLst>
@@ -3128,7 +1937,7 @@
         </p:nvSpPr>
         <p:spPr>
           <a:xfrm>
-            <a:off x="621792" y="5852160"/>
+            <a:off x="9180576" y="1600200"/>
             <a:ext cx="384048" cy="384048"/>
           </a:xfrm>
           <a:prstGeom prst="ellipse">
@@ -3161,14 +1970,14 @@
           <p:nvPr/>
         </p:nvPicPr>
         <p:blipFill>
-          <a:blip r:embed="rId6"/>
+          <a:blip r:embed="rId8"/>
           <a:stretch>
             <a:fillRect/>
           </a:stretch>
         </p:blipFill>
         <p:spPr>
           <a:xfrm>
-            <a:off x="722376" y="5952744"/>
+            <a:off x="9281160" y="1700784"/>
             <a:ext cx="182880" cy="182880"/>
           </a:xfrm>
           <a:prstGeom prst="rect">
@@ -3184,7 +1993,7 @@
         </p:nvSpPr>
         <p:spPr>
           <a:xfrm>
-            <a:off x="1143000" y="5760720"/>
+            <a:off x="9701784" y="1508760"/>
             <a:ext cx="1920240" cy="566928"/>
           </a:xfrm>
           <a:prstGeom prst="rect">
@@ -3221,260 +2030,3725 @@
       </p:sp>
       <p:sp>
         <p:nvSpPr>
-          <p:cNvPr id="40" name="Shape 34"/>
-          <p:cNvSpPr/>
-          <p:nvPr/>
-        </p:nvSpPr>
-        <p:spPr>
-          <a:xfrm>
-            <a:off x="3291840" y="5586984"/>
-            <a:ext cx="4151376" cy="896112"/>
+          <p:cNvPr id="62" name="Rounded Rectangle 61"/>
+          <p:cNvSpPr/>
+          <p:nvPr/>
+        </p:nvSpPr>
+        <p:spPr>
+          <a:xfrm>
+            <a:off x="457200" y="2441448"/>
+            <a:ext cx="2715768" cy="4096512"/>
           </a:xfrm>
           <a:prstGeom prst="roundRect">
             <a:avLst>
-              <a:gd name="adj" fmla="val 10204"/>
+              <a:gd name="adj" fmla="val 4000"/>
             </a:avLst>
           </a:prstGeom>
           <a:solidFill>
             <a:srgbClr val="EEF2F7"/>
           </a:solidFill>
-          <a:ln w="12700">
-            <a:solidFill>
-              <a:srgbClr val="EEF2F7"/>
-            </a:solidFill>
-            <a:prstDash val="solid"/>
+          <a:ln>
+            <a:noFill/>
           </a:ln>
-        </p:spPr>
-        <p:txBody>
-          <a:bodyPr/>
-          <a:lstStyle/>
-          <a:p>
-            <a:endParaRPr lang="es-SV"/>
-          </a:p>
-        </p:txBody>
-      </p:sp>
-      <p:sp>
-        <p:nvSpPr>
-          <p:cNvPr id="41" name="Text 35"/>
-          <p:cNvSpPr txBox="1"/>
-          <p:nvPr/>
-        </p:nvSpPr>
-        <p:spPr>
-          <a:xfrm>
-            <a:off x="3456432" y="5660136"/>
-            <a:ext cx="3858768" cy="749808"/>
-          </a:xfrm>
-          <a:prstGeom prst="rect">
-            <a:avLst/>
-          </a:prstGeom>
-          <a:noFill/>
-          <a:ln/>
-        </p:spPr>
-        <p:txBody>
-          <a:bodyPr wrap="square" lIns="0" tIns="0" rIns="0" bIns="0" rtlCol="0" anchor="ctr"/>
-          <a:lstStyle/>
-          <a:p>
-            <a:pPr marL="152400" indent="-152400">
-              <a:spcAft>
-                <a:spcPts val="200"/>
-              </a:spcAft>
-              <a:buSzPct val="100000"/>
-              <a:buChar char="•"/>
-            </a:pPr>
-            <a:r>
-              <a:rPr lang="en-US" sz="1050" dirty="0">
-                <a:solidFill>
-                  <a:srgbClr val="1B2733"/>
-                </a:solidFill>
-                <a:latin typeface="Calibri" pitchFamily="34" charset="0"/>
-                <a:ea typeface="Calibri" pitchFamily="34" charset="-122"/>
-                <a:cs typeface="Calibri" pitchFamily="34" charset="-120"/>
-              </a:rPr>
-              <a:t>Informe de Análisis de Cartera de TC</a:t>
-            </a:r>
-            <a:endParaRPr lang="en-US" sz="1050" dirty="0"/>
-          </a:p>
-          <a:p>
-            <a:pPr marL="152400" indent="-152400">
-              <a:spcAft>
-                <a:spcPts val="200"/>
-              </a:spcAft>
-              <a:buSzPct val="100000"/>
-              <a:buChar char="•"/>
-            </a:pPr>
-            <a:r>
-              <a:rPr lang="en-US" sz="1050" dirty="0">
-                <a:solidFill>
-                  <a:srgbClr val="1B2733"/>
-                </a:solidFill>
-                <a:latin typeface="Calibri" pitchFamily="34" charset="0"/>
-                <a:ea typeface="Calibri" pitchFamily="34" charset="-122"/>
-                <a:cs typeface="Calibri" pitchFamily="34" charset="-120"/>
-              </a:rPr>
-              <a:t>Simulación de cartera vencida</a:t>
-            </a:r>
-            <a:endParaRPr lang="en-US" sz="1050" dirty="0"/>
-          </a:p>
-          <a:p>
-            <a:pPr marL="152400" indent="-152400">
-              <a:spcAft>
-                <a:spcPts val="200"/>
-              </a:spcAft>
-              <a:buSzPct val="100000"/>
-              <a:buChar char="•"/>
-            </a:pPr>
-            <a:r>
-              <a:rPr lang="en-US" sz="1050" dirty="0">
-                <a:solidFill>
-                  <a:srgbClr val="1B2733"/>
-                </a:solidFill>
-                <a:latin typeface="Calibri" pitchFamily="34" charset="0"/>
-                <a:ea typeface="Calibri" pitchFamily="34" charset="-122"/>
-                <a:cs typeface="Calibri" pitchFamily="34" charset="-120"/>
-              </a:rPr>
-              <a:t>Actualización de Política de TC</a:t>
-            </a:r>
-            <a:endParaRPr lang="en-US" sz="1050" dirty="0"/>
-          </a:p>
-        </p:txBody>
-      </p:sp>
-      <p:sp>
-        <p:nvSpPr>
-          <p:cNvPr id="42" name="Shape 36"/>
-          <p:cNvSpPr/>
-          <p:nvPr/>
-        </p:nvSpPr>
-        <p:spPr>
-          <a:xfrm>
-            <a:off x="7580376" y="5586984"/>
-            <a:ext cx="4151376" cy="896112"/>
+          <a:effectLst/>
+        </p:spPr>
+        <p:style>
+          <a:lnRef idx="1">
+            <a:schemeClr val="accent1"/>
+          </a:lnRef>
+          <a:fillRef idx="3">
+            <a:schemeClr val="accent1"/>
+          </a:fillRef>
+          <a:effectRef idx="2">
+            <a:schemeClr val="accent1"/>
+          </a:effectRef>
+          <a:fontRef idx="minor">
+            <a:schemeClr val="lt1"/>
+          </a:fontRef>
+        </p:style>
+        <p:txBody>
+          <a:bodyPr rtlCol="0" anchor="ctr"/>
+          <a:lstStyle/>
+          <a:p>
+            <a:pPr algn="ctr"/>
+          </a:p>
+        </p:txBody>
+      </p:sp>
+      <p:sp>
+        <p:nvSpPr>
+          <p:cNvPr id="63" name="Rounded Rectangle 62"/>
+          <p:cNvSpPr/>
+          <p:nvPr/>
+        </p:nvSpPr>
+        <p:spPr>
+          <a:xfrm>
+            <a:off x="566928" y="2551176"/>
+            <a:ext cx="2496312" cy="470915"/>
           </a:xfrm>
           <a:prstGeom prst="roundRect">
             <a:avLst>
-              <a:gd name="adj" fmla="val 10204"/>
+              <a:gd name="adj" fmla="val 20000"/>
             </a:avLst>
           </a:prstGeom>
           <a:solidFill>
+            <a:srgbClr val="DCE8F5"/>
+          </a:solidFill>
+          <a:ln>
+            <a:noFill/>
+          </a:ln>
+          <a:effectLst/>
+        </p:spPr>
+        <p:style>
+          <a:lnRef idx="1">
+            <a:schemeClr val="accent1"/>
+          </a:lnRef>
+          <a:fillRef idx="3">
+            <a:schemeClr val="accent1"/>
+          </a:fillRef>
+          <a:effectRef idx="2">
+            <a:schemeClr val="accent1"/>
+          </a:effectRef>
+          <a:fontRef idx="minor">
+            <a:schemeClr val="lt1"/>
+          </a:fontRef>
+        </p:style>
+        <p:txBody>
+          <a:bodyPr rtlCol="0" anchor="ctr"/>
+          <a:lstStyle/>
+          <a:p>
+            <a:pPr algn="ctr"/>
+          </a:p>
+        </p:txBody>
+      </p:sp>
+      <p:sp>
+        <p:nvSpPr>
+          <p:cNvPr id="64" name="TextBox 63"/>
+          <p:cNvSpPr txBox="1"/>
+          <p:nvPr/>
+        </p:nvSpPr>
+        <p:spPr>
+          <a:xfrm>
+            <a:off x="658368" y="2578608"/>
+            <a:ext cx="2313432" cy="416051"/>
+          </a:xfrm>
+          <a:prstGeom prst="rect">
+            <a:avLst/>
+          </a:prstGeom>
+          <a:noFill/>
+        </p:spPr>
+        <p:txBody>
+          <a:bodyPr wrap="square" lIns="0" rIns="0" tIns="0" bIns="0" anchor="t">
+            <a:spAutoFit/>
+          </a:bodyPr>
+          <a:lstStyle/>
+          <a:p>
+            <a:pPr algn="l"/>
+            <a:r>
+              <a:rPr sz="950" b="1">
+                <a:solidFill>
+                  <a:srgbClr val="0B2545"/>
+                </a:solidFill>
+                <a:latin typeface="Calibri"/>
+              </a:rPr>
+              <a:t>1. Resultados preliminares – Riesgos especificos PLD/FT  ·  Circ. 23486</a:t>
+            </a:r>
+          </a:p>
+          <a:p>
+            <a:r>
+              <a:rPr sz="900" b="1">
+                <a:solidFill>
+                  <a:srgbClr val="B86E00"/>
+                </a:solidFill>
+                <a:latin typeface="Calibri"/>
+              </a:rPr>
+              <a:t>Plazo 16/10/2026</a:t>
+            </a:r>
+          </a:p>
+        </p:txBody>
+      </p:sp>
+      <p:sp>
+        <p:nvSpPr>
+          <p:cNvPr id="65" name="Rectangle 64"/>
+          <p:cNvSpPr/>
+          <p:nvPr/>
+        </p:nvSpPr>
+        <p:spPr>
+          <a:xfrm>
+            <a:off x="694944" y="3022091"/>
+            <a:ext cx="10972" cy="160019"/>
+          </a:xfrm>
+          <a:prstGeom prst="rect">
+            <a:avLst/>
+          </a:prstGeom>
+          <a:solidFill>
+            <a:srgbClr val="8FA9C6"/>
+          </a:solidFill>
+          <a:ln>
+            <a:noFill/>
+          </a:ln>
+          <a:effectLst/>
+        </p:spPr>
+        <p:style>
+          <a:lnRef idx="1">
+            <a:schemeClr val="accent1"/>
+          </a:lnRef>
+          <a:fillRef idx="3">
+            <a:schemeClr val="accent1"/>
+          </a:fillRef>
+          <a:effectRef idx="2">
+            <a:schemeClr val="accent1"/>
+          </a:effectRef>
+          <a:fontRef idx="minor">
+            <a:schemeClr val="lt1"/>
+          </a:fontRef>
+        </p:style>
+        <p:txBody>
+          <a:bodyPr rtlCol="0" anchor="ctr"/>
+          <a:lstStyle/>
+          <a:p>
+            <a:pPr algn="ctr"/>
+          </a:p>
+        </p:txBody>
+      </p:sp>
+      <p:sp>
+        <p:nvSpPr>
+          <p:cNvPr id="66" name="Rectangle 65"/>
+          <p:cNvSpPr/>
+          <p:nvPr/>
+        </p:nvSpPr>
+        <p:spPr>
+          <a:xfrm>
+            <a:off x="694944" y="3113531"/>
+            <a:ext cx="109728" cy="10972"/>
+          </a:xfrm>
+          <a:prstGeom prst="rect">
+            <a:avLst/>
+          </a:prstGeom>
+          <a:solidFill>
+            <a:srgbClr val="8FA9C6"/>
+          </a:solidFill>
+          <a:ln>
+            <a:noFill/>
+          </a:ln>
+          <a:effectLst/>
+        </p:spPr>
+        <p:style>
+          <a:lnRef idx="1">
+            <a:schemeClr val="accent1"/>
+          </a:lnRef>
+          <a:fillRef idx="3">
+            <a:schemeClr val="accent1"/>
+          </a:fillRef>
+          <a:effectRef idx="2">
+            <a:schemeClr val="accent1"/>
+          </a:effectRef>
+          <a:fontRef idx="minor">
+            <a:schemeClr val="lt1"/>
+          </a:fontRef>
+        </p:style>
+        <p:txBody>
+          <a:bodyPr rtlCol="0" anchor="ctr"/>
+          <a:lstStyle/>
+          <a:p>
+            <a:pPr algn="ctr"/>
+          </a:p>
+        </p:txBody>
+      </p:sp>
+      <p:sp>
+        <p:nvSpPr>
+          <p:cNvPr id="67" name="Oval 66"/>
+          <p:cNvSpPr/>
+          <p:nvPr/>
+        </p:nvSpPr>
+        <p:spPr>
+          <a:xfrm>
+            <a:off x="804672" y="3090671"/>
+            <a:ext cx="50292" cy="50292"/>
+          </a:xfrm>
+          <a:prstGeom prst="ellipse">
+            <a:avLst/>
+          </a:prstGeom>
+          <a:solidFill>
+            <a:srgbClr val="1F5C99"/>
+          </a:solidFill>
+          <a:ln>
+            <a:noFill/>
+          </a:ln>
+          <a:effectLst/>
+        </p:spPr>
+        <p:style>
+          <a:lnRef idx="1">
+            <a:schemeClr val="accent1"/>
+          </a:lnRef>
+          <a:fillRef idx="3">
+            <a:schemeClr val="accent1"/>
+          </a:fillRef>
+          <a:effectRef idx="2">
+            <a:schemeClr val="accent1"/>
+          </a:effectRef>
+          <a:fontRef idx="minor">
+            <a:schemeClr val="lt1"/>
+          </a:fontRef>
+        </p:style>
+        <p:txBody>
+          <a:bodyPr rtlCol="0" anchor="ctr"/>
+          <a:lstStyle/>
+          <a:p>
+            <a:pPr algn="ctr"/>
+          </a:p>
+        </p:txBody>
+      </p:sp>
+      <p:sp>
+        <p:nvSpPr>
+          <p:cNvPr id="68" name="TextBox 67"/>
+          <p:cNvSpPr txBox="1"/>
+          <p:nvPr/>
+        </p:nvSpPr>
+        <p:spPr>
+          <a:xfrm>
+            <a:off x="896112" y="3049523"/>
+            <a:ext cx="2130552" cy="265176"/>
+          </a:xfrm>
+          <a:prstGeom prst="rect">
+            <a:avLst/>
+          </a:prstGeom>
+          <a:noFill/>
+        </p:spPr>
+        <p:txBody>
+          <a:bodyPr wrap="square" lIns="0" rIns="0" tIns="0" bIns="0" anchor="t">
+            <a:spAutoFit/>
+          </a:bodyPr>
+          <a:lstStyle/>
+          <a:p>
+            <a:pPr algn="l"/>
+            <a:r>
+              <a:rPr sz="900" b="0">
+                <a:solidFill>
+                  <a:srgbClr val="1B2733"/>
+                </a:solidFill>
+                <a:latin typeface="Calibri"/>
+              </a:rPr>
+              <a:t>Gestoines pruebas de descargos según nota DS-SABAO-BCS-BC-23486</a:t>
+            </a:r>
+          </a:p>
+        </p:txBody>
+      </p:sp>
+      <p:sp>
+        <p:nvSpPr>
+          <p:cNvPr id="69" name="Rounded Rectangle 68"/>
+          <p:cNvSpPr/>
+          <p:nvPr/>
+        </p:nvSpPr>
+        <p:spPr>
+          <a:xfrm>
+            <a:off x="566928" y="3369563"/>
+            <a:ext cx="2496312" cy="736092"/>
+          </a:xfrm>
+          <a:prstGeom prst="roundRect">
+            <a:avLst>
+              <a:gd name="adj" fmla="val 20000"/>
+            </a:avLst>
+          </a:prstGeom>
+          <a:solidFill>
+            <a:srgbClr val="DCE8F5"/>
+          </a:solidFill>
+          <a:ln>
+            <a:noFill/>
+          </a:ln>
+          <a:effectLst/>
+        </p:spPr>
+        <p:style>
+          <a:lnRef idx="1">
+            <a:schemeClr val="accent1"/>
+          </a:lnRef>
+          <a:fillRef idx="3">
+            <a:schemeClr val="accent1"/>
+          </a:fillRef>
+          <a:effectRef idx="2">
+            <a:schemeClr val="accent1"/>
+          </a:effectRef>
+          <a:fontRef idx="minor">
+            <a:schemeClr val="lt1"/>
+          </a:fontRef>
+        </p:style>
+        <p:txBody>
+          <a:bodyPr rtlCol="0" anchor="ctr"/>
+          <a:lstStyle/>
+          <a:p>
+            <a:pPr algn="ctr"/>
+          </a:p>
+        </p:txBody>
+      </p:sp>
+      <p:sp>
+        <p:nvSpPr>
+          <p:cNvPr id="70" name="TextBox 69"/>
+          <p:cNvSpPr txBox="1"/>
+          <p:nvPr/>
+        </p:nvSpPr>
+        <p:spPr>
+          <a:xfrm>
+            <a:off x="658368" y="3396995"/>
+            <a:ext cx="2313432" cy="681227"/>
+          </a:xfrm>
+          <a:prstGeom prst="rect">
+            <a:avLst/>
+          </a:prstGeom>
+          <a:noFill/>
+        </p:spPr>
+        <p:txBody>
+          <a:bodyPr wrap="square" lIns="0" rIns="0" tIns="0" bIns="0" anchor="t">
+            <a:spAutoFit/>
+          </a:bodyPr>
+          <a:lstStyle/>
+          <a:p>
+            <a:pPr algn="l"/>
+            <a:r>
+              <a:rPr sz="950" b="1">
+                <a:solidFill>
+                  <a:srgbClr val="0B2545"/>
+                </a:solidFill>
+                <a:latin typeface="Calibri"/>
+              </a:rPr>
+              <a:t>2. Resultados preliminares – Gobierno Corporativo  ·  Circ. 22741</a:t>
+            </a:r>
+          </a:p>
+          <a:p>
+            <a:r>
+              <a:rPr sz="900" b="1">
+                <a:solidFill>
+                  <a:srgbClr val="B86E00"/>
+                </a:solidFill>
+                <a:latin typeface="Calibri"/>
+              </a:rPr>
+              <a:t>Plazo 23/10/2026 · Nuevas observaciones</a:t>
+            </a:r>
+          </a:p>
+          <a:p>
+            <a:r>
+              <a:rPr sz="900" b="1">
+                <a:solidFill>
+                  <a:srgbClr val="B86E00"/>
+                </a:solidFill>
+                <a:latin typeface="Calibri"/>
+              </a:rPr>
+              <a:t>Plazo 30/10/2026 · Seguimiento de observaciones</a:t>
+            </a:r>
+          </a:p>
+        </p:txBody>
+      </p:sp>
+      <p:sp>
+        <p:nvSpPr>
+          <p:cNvPr id="71" name="Rectangle 70"/>
+          <p:cNvSpPr/>
+          <p:nvPr/>
+        </p:nvSpPr>
+        <p:spPr>
+          <a:xfrm>
+            <a:off x="694944" y="4105655"/>
+            <a:ext cx="10972" cy="425195"/>
+          </a:xfrm>
+          <a:prstGeom prst="rect">
+            <a:avLst/>
+          </a:prstGeom>
+          <a:solidFill>
+            <a:srgbClr val="8FA9C6"/>
+          </a:solidFill>
+          <a:ln>
+            <a:noFill/>
+          </a:ln>
+          <a:effectLst/>
+        </p:spPr>
+        <p:style>
+          <a:lnRef idx="1">
+            <a:schemeClr val="accent1"/>
+          </a:lnRef>
+          <a:fillRef idx="3">
+            <a:schemeClr val="accent1"/>
+          </a:fillRef>
+          <a:effectRef idx="2">
+            <a:schemeClr val="accent1"/>
+          </a:effectRef>
+          <a:fontRef idx="minor">
+            <a:schemeClr val="lt1"/>
+          </a:fontRef>
+        </p:style>
+        <p:txBody>
+          <a:bodyPr rtlCol="0" anchor="ctr"/>
+          <a:lstStyle/>
+          <a:p>
+            <a:pPr algn="ctr"/>
+          </a:p>
+        </p:txBody>
+      </p:sp>
+      <p:sp>
+        <p:nvSpPr>
+          <p:cNvPr id="72" name="Rectangle 71"/>
+          <p:cNvSpPr/>
+          <p:nvPr/>
+        </p:nvSpPr>
+        <p:spPr>
+          <a:xfrm>
+            <a:off x="694944" y="4197096"/>
+            <a:ext cx="109728" cy="10972"/>
+          </a:xfrm>
+          <a:prstGeom prst="rect">
+            <a:avLst/>
+          </a:prstGeom>
+          <a:solidFill>
+            <a:srgbClr val="8FA9C6"/>
+          </a:solidFill>
+          <a:ln>
+            <a:noFill/>
+          </a:ln>
+          <a:effectLst/>
+        </p:spPr>
+        <p:style>
+          <a:lnRef idx="1">
+            <a:schemeClr val="accent1"/>
+          </a:lnRef>
+          <a:fillRef idx="3">
+            <a:schemeClr val="accent1"/>
+          </a:fillRef>
+          <a:effectRef idx="2">
+            <a:schemeClr val="accent1"/>
+          </a:effectRef>
+          <a:fontRef idx="minor">
+            <a:schemeClr val="lt1"/>
+          </a:fontRef>
+        </p:style>
+        <p:txBody>
+          <a:bodyPr rtlCol="0" anchor="ctr"/>
+          <a:lstStyle/>
+          <a:p>
+            <a:pPr algn="ctr"/>
+          </a:p>
+        </p:txBody>
+      </p:sp>
+      <p:sp>
+        <p:nvSpPr>
+          <p:cNvPr id="73" name="Oval 72"/>
+          <p:cNvSpPr/>
+          <p:nvPr/>
+        </p:nvSpPr>
+        <p:spPr>
+          <a:xfrm>
+            <a:off x="804672" y="4174235"/>
+            <a:ext cx="50292" cy="50292"/>
+          </a:xfrm>
+          <a:prstGeom prst="ellipse">
+            <a:avLst/>
+          </a:prstGeom>
+          <a:solidFill>
+            <a:srgbClr val="1F5C99"/>
+          </a:solidFill>
+          <a:ln>
+            <a:noFill/>
+          </a:ln>
+          <a:effectLst/>
+        </p:spPr>
+        <p:style>
+          <a:lnRef idx="1">
+            <a:schemeClr val="accent1"/>
+          </a:lnRef>
+          <a:fillRef idx="3">
+            <a:schemeClr val="accent1"/>
+          </a:fillRef>
+          <a:effectRef idx="2">
+            <a:schemeClr val="accent1"/>
+          </a:effectRef>
+          <a:fontRef idx="minor">
+            <a:schemeClr val="lt1"/>
+          </a:fontRef>
+        </p:style>
+        <p:txBody>
+          <a:bodyPr rtlCol="0" anchor="ctr"/>
+          <a:lstStyle/>
+          <a:p>
+            <a:pPr algn="ctr"/>
+          </a:p>
+        </p:txBody>
+      </p:sp>
+      <p:sp>
+        <p:nvSpPr>
+          <p:cNvPr id="74" name="TextBox 73"/>
+          <p:cNvSpPr txBox="1"/>
+          <p:nvPr/>
+        </p:nvSpPr>
+        <p:spPr>
+          <a:xfrm>
+            <a:off x="896112" y="4133087"/>
+            <a:ext cx="2130552" cy="265176"/>
+          </a:xfrm>
+          <a:prstGeom prst="rect">
+            <a:avLst/>
+          </a:prstGeom>
+          <a:noFill/>
+        </p:spPr>
+        <p:txBody>
+          <a:bodyPr wrap="square" lIns="0" rIns="0" tIns="0" bIns="0" anchor="t">
+            <a:spAutoFit/>
+          </a:bodyPr>
+          <a:lstStyle/>
+          <a:p>
+            <a:pPr algn="l"/>
+            <a:r>
+              <a:rPr sz="900" b="0">
+                <a:solidFill>
+                  <a:srgbClr val="1B2733"/>
+                </a:solidFill>
+                <a:latin typeface="Calibri"/>
+              </a:rPr>
+              <a:t>Gestiones prueba de descargos  según nota DS-SABAO-BCS-BC-22741</a:t>
+            </a:r>
+          </a:p>
+        </p:txBody>
+      </p:sp>
+      <p:sp>
+        <p:nvSpPr>
+          <p:cNvPr id="75" name="Rectangle 74"/>
+          <p:cNvSpPr/>
+          <p:nvPr/>
+        </p:nvSpPr>
+        <p:spPr>
+          <a:xfrm>
+            <a:off x="694944" y="4462272"/>
+            <a:ext cx="109728" cy="10972"/>
+          </a:xfrm>
+          <a:prstGeom prst="rect">
+            <a:avLst/>
+          </a:prstGeom>
+          <a:solidFill>
+            <a:srgbClr val="8FA9C6"/>
+          </a:solidFill>
+          <a:ln>
+            <a:noFill/>
+          </a:ln>
+          <a:effectLst/>
+        </p:spPr>
+        <p:style>
+          <a:lnRef idx="1">
+            <a:schemeClr val="accent1"/>
+          </a:lnRef>
+          <a:fillRef idx="3">
+            <a:schemeClr val="accent1"/>
+          </a:fillRef>
+          <a:effectRef idx="2">
+            <a:schemeClr val="accent1"/>
+          </a:effectRef>
+          <a:fontRef idx="minor">
+            <a:schemeClr val="lt1"/>
+          </a:fontRef>
+        </p:style>
+        <p:txBody>
+          <a:bodyPr rtlCol="0" anchor="ctr"/>
+          <a:lstStyle/>
+          <a:p>
+            <a:pPr algn="ctr"/>
+          </a:p>
+        </p:txBody>
+      </p:sp>
+      <p:sp>
+        <p:nvSpPr>
+          <p:cNvPr id="76" name="Oval 75"/>
+          <p:cNvSpPr/>
+          <p:nvPr/>
+        </p:nvSpPr>
+        <p:spPr>
+          <a:xfrm>
+            <a:off x="804672" y="4439412"/>
+            <a:ext cx="50292" cy="50292"/>
+          </a:xfrm>
+          <a:prstGeom prst="ellipse">
+            <a:avLst/>
+          </a:prstGeom>
+          <a:solidFill>
+            <a:srgbClr val="1F5C99"/>
+          </a:solidFill>
+          <a:ln>
+            <a:noFill/>
+          </a:ln>
+          <a:effectLst/>
+        </p:spPr>
+        <p:style>
+          <a:lnRef idx="1">
+            <a:schemeClr val="accent1"/>
+          </a:lnRef>
+          <a:fillRef idx="3">
+            <a:schemeClr val="accent1"/>
+          </a:fillRef>
+          <a:effectRef idx="2">
+            <a:schemeClr val="accent1"/>
+          </a:effectRef>
+          <a:fontRef idx="minor">
+            <a:schemeClr val="lt1"/>
+          </a:fontRef>
+        </p:style>
+        <p:txBody>
+          <a:bodyPr rtlCol="0" anchor="ctr"/>
+          <a:lstStyle/>
+          <a:p>
+            <a:pPr algn="ctr"/>
+          </a:p>
+        </p:txBody>
+      </p:sp>
+      <p:sp>
+        <p:nvSpPr>
+          <p:cNvPr id="77" name="TextBox 76"/>
+          <p:cNvSpPr txBox="1"/>
+          <p:nvPr/>
+        </p:nvSpPr>
+        <p:spPr>
+          <a:xfrm>
+            <a:off x="896112" y="4398264"/>
+            <a:ext cx="2130552" cy="265176"/>
+          </a:xfrm>
+          <a:prstGeom prst="rect">
+            <a:avLst/>
+          </a:prstGeom>
+          <a:noFill/>
+        </p:spPr>
+        <p:txBody>
+          <a:bodyPr wrap="square" lIns="0" rIns="0" tIns="0" bIns="0" anchor="t">
+            <a:spAutoFit/>
+          </a:bodyPr>
+          <a:lstStyle/>
+          <a:p>
+            <a:pPr algn="l"/>
+            <a:r>
+              <a:rPr sz="900" b="0">
+                <a:solidFill>
+                  <a:srgbClr val="1B2733"/>
+                </a:solidFill>
+                <a:latin typeface="Calibri"/>
+              </a:rPr>
+              <a:t>Presentación visita de supervisión gobierno corporativo</a:t>
+            </a:r>
+          </a:p>
+        </p:txBody>
+      </p:sp>
+      <p:sp>
+        <p:nvSpPr>
+          <p:cNvPr id="78" name="Rounded Rectangle 77"/>
+          <p:cNvSpPr/>
+          <p:nvPr/>
+        </p:nvSpPr>
+        <p:spPr>
+          <a:xfrm>
+            <a:off x="566928" y="4718303"/>
+            <a:ext cx="2496312" cy="470915"/>
+          </a:xfrm>
+          <a:prstGeom prst="roundRect">
+            <a:avLst>
+              <a:gd name="adj" fmla="val 20000"/>
+            </a:avLst>
+          </a:prstGeom>
+          <a:solidFill>
+            <a:srgbClr val="DCE8F5"/>
+          </a:solidFill>
+          <a:ln>
+            <a:noFill/>
+          </a:ln>
+          <a:effectLst/>
+        </p:spPr>
+        <p:style>
+          <a:lnRef idx="1">
+            <a:schemeClr val="accent1"/>
+          </a:lnRef>
+          <a:fillRef idx="3">
+            <a:schemeClr val="accent1"/>
+          </a:fillRef>
+          <a:effectRef idx="2">
+            <a:schemeClr val="accent1"/>
+          </a:effectRef>
+          <a:fontRef idx="minor">
+            <a:schemeClr val="lt1"/>
+          </a:fontRef>
+        </p:style>
+        <p:txBody>
+          <a:bodyPr rtlCol="0" anchor="ctr"/>
+          <a:lstStyle/>
+          <a:p>
+            <a:pPr algn="ctr"/>
+          </a:p>
+        </p:txBody>
+      </p:sp>
+      <p:sp>
+        <p:nvSpPr>
+          <p:cNvPr id="79" name="TextBox 78"/>
+          <p:cNvSpPr txBox="1"/>
+          <p:nvPr/>
+        </p:nvSpPr>
+        <p:spPr>
+          <a:xfrm>
+            <a:off x="658368" y="4745736"/>
+            <a:ext cx="2313432" cy="416051"/>
+          </a:xfrm>
+          <a:prstGeom prst="rect">
+            <a:avLst/>
+          </a:prstGeom>
+          <a:noFill/>
+        </p:spPr>
+        <p:txBody>
+          <a:bodyPr wrap="square" lIns="0" rIns="0" tIns="0" bIns="0" anchor="t">
+            <a:spAutoFit/>
+          </a:bodyPr>
+          <a:lstStyle/>
+          <a:p>
+            <a:pPr algn="l"/>
+            <a:r>
+              <a:rPr sz="950" b="1">
+                <a:solidFill>
+                  <a:srgbClr val="0B2545"/>
+                </a:solidFill>
+                <a:latin typeface="Calibri"/>
+              </a:rPr>
+              <a:t>3. Resultado preliminar Plan de Recuperación  ·  Circ. 22737</a:t>
+            </a:r>
+          </a:p>
+          <a:p>
+            <a:r>
+              <a:rPr sz="900" b="1">
+                <a:solidFill>
+                  <a:srgbClr val="B86E00"/>
+                </a:solidFill>
+                <a:latin typeface="Calibri"/>
+              </a:rPr>
+              <a:t>Plazo 03/11/2026</a:t>
+            </a:r>
+          </a:p>
+        </p:txBody>
+      </p:sp>
+      <p:sp>
+        <p:nvSpPr>
+          <p:cNvPr id="80" name="Rounded Rectangle 79"/>
+          <p:cNvSpPr/>
+          <p:nvPr/>
+        </p:nvSpPr>
+        <p:spPr>
+          <a:xfrm>
+            <a:off x="566928" y="5244083"/>
+            <a:ext cx="2496312" cy="470915"/>
+          </a:xfrm>
+          <a:prstGeom prst="roundRect">
+            <a:avLst>
+              <a:gd name="adj" fmla="val 20000"/>
+            </a:avLst>
+          </a:prstGeom>
+          <a:solidFill>
+            <a:srgbClr val="DCE8F5"/>
+          </a:solidFill>
+          <a:ln>
+            <a:noFill/>
+          </a:ln>
+          <a:effectLst/>
+        </p:spPr>
+        <p:style>
+          <a:lnRef idx="1">
+            <a:schemeClr val="accent1"/>
+          </a:lnRef>
+          <a:fillRef idx="3">
+            <a:schemeClr val="accent1"/>
+          </a:fillRef>
+          <a:effectRef idx="2">
+            <a:schemeClr val="accent1"/>
+          </a:effectRef>
+          <a:fontRef idx="minor">
+            <a:schemeClr val="lt1"/>
+          </a:fontRef>
+        </p:style>
+        <p:txBody>
+          <a:bodyPr rtlCol="0" anchor="ctr"/>
+          <a:lstStyle/>
+          <a:p>
+            <a:pPr algn="ctr"/>
+          </a:p>
+        </p:txBody>
+      </p:sp>
+      <p:sp>
+        <p:nvSpPr>
+          <p:cNvPr id="81" name="TextBox 80"/>
+          <p:cNvSpPr txBox="1"/>
+          <p:nvPr/>
+        </p:nvSpPr>
+        <p:spPr>
+          <a:xfrm>
+            <a:off x="658368" y="5271515"/>
+            <a:ext cx="2313432" cy="416051"/>
+          </a:xfrm>
+          <a:prstGeom prst="rect">
+            <a:avLst/>
+          </a:prstGeom>
+          <a:noFill/>
+        </p:spPr>
+        <p:txBody>
+          <a:bodyPr wrap="square" lIns="0" rIns="0" tIns="0" bIns="0" anchor="t">
+            <a:spAutoFit/>
+          </a:bodyPr>
+          <a:lstStyle/>
+          <a:p>
+            <a:pPr algn="l"/>
+            <a:r>
+              <a:rPr sz="950" b="1">
+                <a:solidFill>
+                  <a:srgbClr val="0B2545"/>
+                </a:solidFill>
+                <a:latin typeface="Calibri"/>
+              </a:rPr>
+              <a:t>4. Riesgo Credito, Mercado y Liquidez  ·  Circ. 22742</a:t>
+            </a:r>
+          </a:p>
+          <a:p>
+            <a:r>
+              <a:rPr sz="900" b="1">
+                <a:solidFill>
+                  <a:srgbClr val="B86E00"/>
+                </a:solidFill>
+                <a:latin typeface="Calibri"/>
+              </a:rPr>
+              <a:t>Inicio visita 09/10</a:t>
+            </a:r>
+          </a:p>
+        </p:txBody>
+      </p:sp>
+      <p:sp>
+        <p:nvSpPr>
+          <p:cNvPr id="82" name="Rectangle 81"/>
+          <p:cNvSpPr/>
+          <p:nvPr/>
+        </p:nvSpPr>
+        <p:spPr>
+          <a:xfrm>
+            <a:off x="694944" y="5714999"/>
+            <a:ext cx="10972" cy="160019"/>
+          </a:xfrm>
+          <a:prstGeom prst="rect">
+            <a:avLst/>
+          </a:prstGeom>
+          <a:solidFill>
+            <a:srgbClr val="8FA9C6"/>
+          </a:solidFill>
+          <a:ln>
+            <a:noFill/>
+          </a:ln>
+          <a:effectLst/>
+        </p:spPr>
+        <p:style>
+          <a:lnRef idx="1">
+            <a:schemeClr val="accent1"/>
+          </a:lnRef>
+          <a:fillRef idx="3">
+            <a:schemeClr val="accent1"/>
+          </a:fillRef>
+          <a:effectRef idx="2">
+            <a:schemeClr val="accent1"/>
+          </a:effectRef>
+          <a:fontRef idx="minor">
+            <a:schemeClr val="lt1"/>
+          </a:fontRef>
+        </p:style>
+        <p:txBody>
+          <a:bodyPr rtlCol="0" anchor="ctr"/>
+          <a:lstStyle/>
+          <a:p>
+            <a:pPr algn="ctr"/>
+          </a:p>
+        </p:txBody>
+      </p:sp>
+      <p:sp>
+        <p:nvSpPr>
+          <p:cNvPr id="83" name="Rectangle 82"/>
+          <p:cNvSpPr/>
+          <p:nvPr/>
+        </p:nvSpPr>
+        <p:spPr>
+          <a:xfrm>
+            <a:off x="694944" y="5806439"/>
+            <a:ext cx="109728" cy="10972"/>
+          </a:xfrm>
+          <a:prstGeom prst="rect">
+            <a:avLst/>
+          </a:prstGeom>
+          <a:solidFill>
+            <a:srgbClr val="8FA9C6"/>
+          </a:solidFill>
+          <a:ln>
+            <a:noFill/>
+          </a:ln>
+          <a:effectLst/>
+        </p:spPr>
+        <p:style>
+          <a:lnRef idx="1">
+            <a:schemeClr val="accent1"/>
+          </a:lnRef>
+          <a:fillRef idx="3">
+            <a:schemeClr val="accent1"/>
+          </a:fillRef>
+          <a:effectRef idx="2">
+            <a:schemeClr val="accent1"/>
+          </a:effectRef>
+          <a:fontRef idx="minor">
+            <a:schemeClr val="lt1"/>
+          </a:fontRef>
+        </p:style>
+        <p:txBody>
+          <a:bodyPr rtlCol="0" anchor="ctr"/>
+          <a:lstStyle/>
+          <a:p>
+            <a:pPr algn="ctr"/>
+          </a:p>
+        </p:txBody>
+      </p:sp>
+      <p:sp>
+        <p:nvSpPr>
+          <p:cNvPr id="84" name="Oval 83"/>
+          <p:cNvSpPr/>
+          <p:nvPr/>
+        </p:nvSpPr>
+        <p:spPr>
+          <a:xfrm>
+            <a:off x="804672" y="5783579"/>
+            <a:ext cx="50292" cy="50292"/>
+          </a:xfrm>
+          <a:prstGeom prst="ellipse">
+            <a:avLst/>
+          </a:prstGeom>
+          <a:solidFill>
+            <a:srgbClr val="1F5C99"/>
+          </a:solidFill>
+          <a:ln>
+            <a:noFill/>
+          </a:ln>
+          <a:effectLst/>
+        </p:spPr>
+        <p:style>
+          <a:lnRef idx="1">
+            <a:schemeClr val="accent1"/>
+          </a:lnRef>
+          <a:fillRef idx="3">
+            <a:schemeClr val="accent1"/>
+          </a:fillRef>
+          <a:effectRef idx="2">
+            <a:schemeClr val="accent1"/>
+          </a:effectRef>
+          <a:fontRef idx="minor">
+            <a:schemeClr val="lt1"/>
+          </a:fontRef>
+        </p:style>
+        <p:txBody>
+          <a:bodyPr rtlCol="0" anchor="ctr"/>
+          <a:lstStyle/>
+          <a:p>
+            <a:pPr algn="ctr"/>
+          </a:p>
+        </p:txBody>
+      </p:sp>
+      <p:sp>
+        <p:nvSpPr>
+          <p:cNvPr id="85" name="TextBox 84"/>
+          <p:cNvSpPr txBox="1"/>
+          <p:nvPr/>
+        </p:nvSpPr>
+        <p:spPr>
+          <a:xfrm>
+            <a:off x="896112" y="5742431"/>
+            <a:ext cx="2130552" cy="265176"/>
+          </a:xfrm>
+          <a:prstGeom prst="rect">
+            <a:avLst/>
+          </a:prstGeom>
+          <a:noFill/>
+        </p:spPr>
+        <p:txBody>
+          <a:bodyPr wrap="square" lIns="0" rIns="0" tIns="0" bIns="0" anchor="t">
+            <a:spAutoFit/>
+          </a:bodyPr>
+          <a:lstStyle/>
+          <a:p>
+            <a:pPr algn="l"/>
+            <a:r>
+              <a:rPr sz="900" b="0">
+                <a:solidFill>
+                  <a:srgbClr val="1B2733"/>
+                </a:solidFill>
+                <a:latin typeface="Calibri"/>
+              </a:rPr>
+              <a:t>Presentación resultados preliminares de Gestión de Riesgos Específicos</a:t>
+            </a:r>
+          </a:p>
+        </p:txBody>
+      </p:sp>
+      <p:sp>
+        <p:nvSpPr>
+          <p:cNvPr id="86" name="Rounded Rectangle 85"/>
+          <p:cNvSpPr/>
+          <p:nvPr/>
+        </p:nvSpPr>
+        <p:spPr>
+          <a:xfrm>
+            <a:off x="566928" y="6062471"/>
+            <a:ext cx="2496312" cy="338328"/>
+          </a:xfrm>
+          <a:prstGeom prst="roundRect">
+            <a:avLst>
+              <a:gd name="adj" fmla="val 20000"/>
+            </a:avLst>
+          </a:prstGeom>
+          <a:solidFill>
+            <a:srgbClr val="DCE8F5"/>
+          </a:solidFill>
+          <a:ln>
+            <a:noFill/>
+          </a:ln>
+          <a:effectLst/>
+        </p:spPr>
+        <p:style>
+          <a:lnRef idx="1">
+            <a:schemeClr val="accent1"/>
+          </a:lnRef>
+          <a:fillRef idx="3">
+            <a:schemeClr val="accent1"/>
+          </a:fillRef>
+          <a:effectRef idx="2">
+            <a:schemeClr val="accent1"/>
+          </a:effectRef>
+          <a:fontRef idx="minor">
+            <a:schemeClr val="lt1"/>
+          </a:fontRef>
+        </p:style>
+        <p:txBody>
+          <a:bodyPr rtlCol="0" anchor="ctr"/>
+          <a:lstStyle/>
+          <a:p>
+            <a:pPr algn="ctr"/>
+          </a:p>
+        </p:txBody>
+      </p:sp>
+      <p:sp>
+        <p:nvSpPr>
+          <p:cNvPr id="87" name="TextBox 86"/>
+          <p:cNvSpPr txBox="1"/>
+          <p:nvPr/>
+        </p:nvSpPr>
+        <p:spPr>
+          <a:xfrm>
+            <a:off x="658368" y="6089903"/>
+            <a:ext cx="2313432" cy="283464"/>
+          </a:xfrm>
+          <a:prstGeom prst="rect">
+            <a:avLst/>
+          </a:prstGeom>
+          <a:noFill/>
+        </p:spPr>
+        <p:txBody>
+          <a:bodyPr wrap="square" lIns="0" rIns="0" tIns="0" bIns="0" anchor="t">
+            <a:spAutoFit/>
+          </a:bodyPr>
+          <a:lstStyle/>
+          <a:p>
+            <a:pPr algn="l"/>
+            <a:r>
+              <a:rPr sz="950" b="1">
+                <a:solidFill>
+                  <a:srgbClr val="0B2545"/>
+                </a:solidFill>
+                <a:latin typeface="Calibri"/>
+              </a:rPr>
+              <a:t>5. Reunion con ente regulador SSF– fecha de visita 15/10/2026</a:t>
+            </a:r>
+          </a:p>
+        </p:txBody>
+      </p:sp>
+      <p:sp>
+        <p:nvSpPr>
+          <p:cNvPr id="88" name="Rounded Rectangle 87"/>
+          <p:cNvSpPr/>
+          <p:nvPr/>
+        </p:nvSpPr>
+        <p:spPr>
+          <a:xfrm>
+            <a:off x="3310128" y="2441448"/>
+            <a:ext cx="2715768" cy="4096512"/>
+          </a:xfrm>
+          <a:prstGeom prst="roundRect">
+            <a:avLst>
+              <a:gd name="adj" fmla="val 4000"/>
+            </a:avLst>
+          </a:prstGeom>
+          <a:solidFill>
             <a:srgbClr val="EEF2F7"/>
           </a:solidFill>
-          <a:ln w="12700">
-            <a:solidFill>
-              <a:srgbClr val="EEF2F7"/>
-            </a:solidFill>
-            <a:prstDash val="solid"/>
+          <a:ln>
+            <a:noFill/>
           </a:ln>
-        </p:spPr>
-        <p:txBody>
-          <a:bodyPr/>
-          <a:lstStyle/>
-          <a:p>
-            <a:endParaRPr lang="es-SV"/>
-          </a:p>
-        </p:txBody>
-      </p:sp>
-      <p:sp>
-        <p:nvSpPr>
-          <p:cNvPr id="43" name="Text 37"/>
+          <a:effectLst/>
+        </p:spPr>
+        <p:style>
+          <a:lnRef idx="1">
+            <a:schemeClr val="accent1"/>
+          </a:lnRef>
+          <a:fillRef idx="3">
+            <a:schemeClr val="accent1"/>
+          </a:fillRef>
+          <a:effectRef idx="2">
+            <a:schemeClr val="accent1"/>
+          </a:effectRef>
+          <a:fontRef idx="minor">
+            <a:schemeClr val="lt1"/>
+          </a:fontRef>
+        </p:style>
+        <p:txBody>
+          <a:bodyPr rtlCol="0" anchor="ctr"/>
+          <a:lstStyle/>
+          <a:p>
+            <a:pPr algn="ctr"/>
+          </a:p>
+        </p:txBody>
+      </p:sp>
+      <p:sp>
+        <p:nvSpPr>
+          <p:cNvPr id="89" name="Rounded Rectangle 88"/>
+          <p:cNvSpPr/>
+          <p:nvPr/>
+        </p:nvSpPr>
+        <p:spPr>
+          <a:xfrm>
+            <a:off x="3419856" y="2551176"/>
+            <a:ext cx="2496312" cy="196596"/>
+          </a:xfrm>
+          <a:prstGeom prst="roundRect">
+            <a:avLst>
+              <a:gd name="adj" fmla="val 20000"/>
+            </a:avLst>
+          </a:prstGeom>
+          <a:solidFill>
+            <a:srgbClr val="DCE8F5"/>
+          </a:solidFill>
+          <a:ln>
+            <a:noFill/>
+          </a:ln>
+          <a:effectLst/>
+        </p:spPr>
+        <p:style>
+          <a:lnRef idx="1">
+            <a:schemeClr val="accent1"/>
+          </a:lnRef>
+          <a:fillRef idx="3">
+            <a:schemeClr val="accent1"/>
+          </a:fillRef>
+          <a:effectRef idx="2">
+            <a:schemeClr val="accent1"/>
+          </a:effectRef>
+          <a:fontRef idx="minor">
+            <a:schemeClr val="lt1"/>
+          </a:fontRef>
+        </p:style>
+        <p:txBody>
+          <a:bodyPr rtlCol="0" anchor="ctr"/>
+          <a:lstStyle/>
+          <a:p>
+            <a:pPr algn="ctr"/>
+          </a:p>
+        </p:txBody>
+      </p:sp>
+      <p:sp>
+        <p:nvSpPr>
+          <p:cNvPr id="90" name="TextBox 89"/>
           <p:cNvSpPr txBox="1"/>
           <p:nvPr/>
         </p:nvSpPr>
         <p:spPr>
           <a:xfrm>
-            <a:off x="7744968" y="5660136"/>
-            <a:ext cx="3858768" cy="749808"/>
+            <a:off x="3511296" y="2578608"/>
+            <a:ext cx="2313432" cy="141732"/>
           </a:xfrm>
           <a:prstGeom prst="rect">
             <a:avLst/>
           </a:prstGeom>
           <a:noFill/>
-          <a:ln/>
-        </p:spPr>
-        <p:txBody>
-          <a:bodyPr wrap="square" lIns="0" tIns="0" rIns="0" bIns="0" rtlCol="0" anchor="ctr"/>
-          <a:lstStyle/>
-          <a:p>
-            <a:pPr marL="152400" indent="-152400">
-              <a:spcAft>
-                <a:spcPts val="200"/>
-              </a:spcAft>
-              <a:buSzPct val="100000"/>
-              <a:buChar char="•"/>
-            </a:pPr>
-            <a:r>
-              <a:rPr lang="en-US" sz="1050" dirty="0">
+        </p:spPr>
+        <p:txBody>
+          <a:bodyPr wrap="square" lIns="0" rIns="0" tIns="0" bIns="0" anchor="t">
+            <a:spAutoFit/>
+          </a:bodyPr>
+          <a:lstStyle/>
+          <a:p>
+            <a:pPr algn="l"/>
+            <a:r>
+              <a:rPr sz="950" b="1">
+                <a:solidFill>
+                  <a:srgbClr val="0B2545"/>
+                </a:solidFill>
+                <a:latin typeface="Calibri"/>
+              </a:rPr>
+              <a:t>1. Capacitación y Examen GIR 2026</a:t>
+            </a:r>
+          </a:p>
+        </p:txBody>
+      </p:sp>
+      <p:sp>
+        <p:nvSpPr>
+          <p:cNvPr id="91" name="Rectangle 90"/>
+          <p:cNvSpPr/>
+          <p:nvPr/>
+        </p:nvSpPr>
+        <p:spPr>
+          <a:xfrm>
+            <a:off x="3547872" y="2747772"/>
+            <a:ext cx="10972" cy="160019"/>
+          </a:xfrm>
+          <a:prstGeom prst="rect">
+            <a:avLst/>
+          </a:prstGeom>
+          <a:solidFill>
+            <a:srgbClr val="8FA9C6"/>
+          </a:solidFill>
+          <a:ln>
+            <a:noFill/>
+          </a:ln>
+          <a:effectLst/>
+        </p:spPr>
+        <p:style>
+          <a:lnRef idx="1">
+            <a:schemeClr val="accent1"/>
+          </a:lnRef>
+          <a:fillRef idx="3">
+            <a:schemeClr val="accent1"/>
+          </a:fillRef>
+          <a:effectRef idx="2">
+            <a:schemeClr val="accent1"/>
+          </a:effectRef>
+          <a:fontRef idx="minor">
+            <a:schemeClr val="lt1"/>
+          </a:fontRef>
+        </p:style>
+        <p:txBody>
+          <a:bodyPr rtlCol="0" anchor="ctr"/>
+          <a:lstStyle/>
+          <a:p>
+            <a:pPr algn="ctr"/>
+          </a:p>
+        </p:txBody>
+      </p:sp>
+      <p:sp>
+        <p:nvSpPr>
+          <p:cNvPr id="92" name="Rectangle 91"/>
+          <p:cNvSpPr/>
+          <p:nvPr/>
+        </p:nvSpPr>
+        <p:spPr>
+          <a:xfrm>
+            <a:off x="3547872" y="2839211"/>
+            <a:ext cx="109728" cy="10972"/>
+          </a:xfrm>
+          <a:prstGeom prst="rect">
+            <a:avLst/>
+          </a:prstGeom>
+          <a:solidFill>
+            <a:srgbClr val="8FA9C6"/>
+          </a:solidFill>
+          <a:ln>
+            <a:noFill/>
+          </a:ln>
+          <a:effectLst/>
+        </p:spPr>
+        <p:style>
+          <a:lnRef idx="1">
+            <a:schemeClr val="accent1"/>
+          </a:lnRef>
+          <a:fillRef idx="3">
+            <a:schemeClr val="accent1"/>
+          </a:fillRef>
+          <a:effectRef idx="2">
+            <a:schemeClr val="accent1"/>
+          </a:effectRef>
+          <a:fontRef idx="minor">
+            <a:schemeClr val="lt1"/>
+          </a:fontRef>
+        </p:style>
+        <p:txBody>
+          <a:bodyPr rtlCol="0" anchor="ctr"/>
+          <a:lstStyle/>
+          <a:p>
+            <a:pPr algn="ctr"/>
+          </a:p>
+        </p:txBody>
+      </p:sp>
+      <p:sp>
+        <p:nvSpPr>
+          <p:cNvPr id="93" name="Oval 92"/>
+          <p:cNvSpPr/>
+          <p:nvPr/>
+        </p:nvSpPr>
+        <p:spPr>
+          <a:xfrm>
+            <a:off x="3657600" y="2816351"/>
+            <a:ext cx="50292" cy="50292"/>
+          </a:xfrm>
+          <a:prstGeom prst="ellipse">
+            <a:avLst/>
+          </a:prstGeom>
+          <a:solidFill>
+            <a:srgbClr val="1F5C99"/>
+          </a:solidFill>
+          <a:ln>
+            <a:noFill/>
+          </a:ln>
+          <a:effectLst/>
+        </p:spPr>
+        <p:style>
+          <a:lnRef idx="1">
+            <a:schemeClr val="accent1"/>
+          </a:lnRef>
+          <a:fillRef idx="3">
+            <a:schemeClr val="accent1"/>
+          </a:fillRef>
+          <a:effectRef idx="2">
+            <a:schemeClr val="accent1"/>
+          </a:effectRef>
+          <a:fontRef idx="minor">
+            <a:schemeClr val="lt1"/>
+          </a:fontRef>
+        </p:style>
+        <p:txBody>
+          <a:bodyPr rtlCol="0" anchor="ctr"/>
+          <a:lstStyle/>
+          <a:p>
+            <a:pPr algn="ctr"/>
+          </a:p>
+        </p:txBody>
+      </p:sp>
+      <p:sp>
+        <p:nvSpPr>
+          <p:cNvPr id="94" name="TextBox 93"/>
+          <p:cNvSpPr txBox="1"/>
+          <p:nvPr/>
+        </p:nvSpPr>
+        <p:spPr>
+          <a:xfrm>
+            <a:off x="3749040" y="2775203"/>
+            <a:ext cx="2130552" cy="265176"/>
+          </a:xfrm>
+          <a:prstGeom prst="rect">
+            <a:avLst/>
+          </a:prstGeom>
+          <a:noFill/>
+        </p:spPr>
+        <p:txBody>
+          <a:bodyPr wrap="square" lIns="0" rIns="0" tIns="0" bIns="0" anchor="t">
+            <a:spAutoFit/>
+          </a:bodyPr>
+          <a:lstStyle/>
+          <a:p>
+            <a:pPr algn="l"/>
+            <a:r>
+              <a:rPr sz="900" b="0">
                 <a:solidFill>
                   <a:srgbClr val="1B2733"/>
                 </a:solidFill>
-                <a:latin typeface="Calibri" pitchFamily="34" charset="0"/>
-                <a:ea typeface="Calibri" pitchFamily="34" charset="-122"/>
-                <a:cs typeface="Calibri" pitchFamily="34" charset="-120"/>
-              </a:rPr>
-              <a:t>Envío de información a la Central de Riesgo (NRP-41)</a:t>
-            </a:r>
-            <a:endParaRPr lang="en-US" sz="1050" dirty="0"/>
-          </a:p>
-          <a:p>
-            <a:pPr marL="152400" indent="-152400">
-              <a:spcAft>
-                <a:spcPts val="200"/>
-              </a:spcAft>
-              <a:buSzPct val="100000"/>
-              <a:buChar char="•"/>
-            </a:pPr>
-            <a:r>
-              <a:rPr lang="en-US" sz="1050" dirty="0">
+                <a:latin typeface="Calibri"/>
+              </a:rPr>
+              <a:t>Informe final de resultados de Capacitación de GIR 2026</a:t>
+            </a:r>
+          </a:p>
+        </p:txBody>
+      </p:sp>
+      <p:sp>
+        <p:nvSpPr>
+          <p:cNvPr id="95" name="Rounded Rectangle 94"/>
+          <p:cNvSpPr/>
+          <p:nvPr/>
+        </p:nvSpPr>
+        <p:spPr>
+          <a:xfrm>
+            <a:off x="3419856" y="3095244"/>
+            <a:ext cx="2496312" cy="196596"/>
+          </a:xfrm>
+          <a:prstGeom prst="roundRect">
+            <a:avLst>
+              <a:gd name="adj" fmla="val 20000"/>
+            </a:avLst>
+          </a:prstGeom>
+          <a:solidFill>
+            <a:srgbClr val="DCE8F5"/>
+          </a:solidFill>
+          <a:ln>
+            <a:noFill/>
+          </a:ln>
+          <a:effectLst/>
+        </p:spPr>
+        <p:style>
+          <a:lnRef idx="1">
+            <a:schemeClr val="accent1"/>
+          </a:lnRef>
+          <a:fillRef idx="3">
+            <a:schemeClr val="accent1"/>
+          </a:fillRef>
+          <a:effectRef idx="2">
+            <a:schemeClr val="accent1"/>
+          </a:effectRef>
+          <a:fontRef idx="minor">
+            <a:schemeClr val="lt1"/>
+          </a:fontRef>
+        </p:style>
+        <p:txBody>
+          <a:bodyPr rtlCol="0" anchor="ctr"/>
+          <a:lstStyle/>
+          <a:p>
+            <a:pPr algn="ctr"/>
+          </a:p>
+        </p:txBody>
+      </p:sp>
+      <p:sp>
+        <p:nvSpPr>
+          <p:cNvPr id="96" name="TextBox 95"/>
+          <p:cNvSpPr txBox="1"/>
+          <p:nvPr/>
+        </p:nvSpPr>
+        <p:spPr>
+          <a:xfrm>
+            <a:off x="3511296" y="3122675"/>
+            <a:ext cx="2313432" cy="141732"/>
+          </a:xfrm>
+          <a:prstGeom prst="rect">
+            <a:avLst/>
+          </a:prstGeom>
+          <a:noFill/>
+        </p:spPr>
+        <p:txBody>
+          <a:bodyPr wrap="square" lIns="0" rIns="0" tIns="0" bIns="0" anchor="t">
+            <a:spAutoFit/>
+          </a:bodyPr>
+          <a:lstStyle/>
+          <a:p>
+            <a:pPr algn="l"/>
+            <a:r>
+              <a:rPr sz="950" b="1">
+                <a:solidFill>
+                  <a:srgbClr val="0B2545"/>
+                </a:solidFill>
+                <a:latin typeface="Calibri"/>
+              </a:rPr>
+              <a:t>2. Segunda prueba de continuidad de negocio</a:t>
+            </a:r>
+          </a:p>
+        </p:txBody>
+      </p:sp>
+      <p:sp>
+        <p:nvSpPr>
+          <p:cNvPr id="97" name="Rectangle 96"/>
+          <p:cNvSpPr/>
+          <p:nvPr/>
+        </p:nvSpPr>
+        <p:spPr>
+          <a:xfrm>
+            <a:off x="3547872" y="3291839"/>
+            <a:ext cx="10972" cy="160019"/>
+          </a:xfrm>
+          <a:prstGeom prst="rect">
+            <a:avLst/>
+          </a:prstGeom>
+          <a:solidFill>
+            <a:srgbClr val="8FA9C6"/>
+          </a:solidFill>
+          <a:ln>
+            <a:noFill/>
+          </a:ln>
+          <a:effectLst/>
+        </p:spPr>
+        <p:style>
+          <a:lnRef idx="1">
+            <a:schemeClr val="accent1"/>
+          </a:lnRef>
+          <a:fillRef idx="3">
+            <a:schemeClr val="accent1"/>
+          </a:fillRef>
+          <a:effectRef idx="2">
+            <a:schemeClr val="accent1"/>
+          </a:effectRef>
+          <a:fontRef idx="minor">
+            <a:schemeClr val="lt1"/>
+          </a:fontRef>
+        </p:style>
+        <p:txBody>
+          <a:bodyPr rtlCol="0" anchor="ctr"/>
+          <a:lstStyle/>
+          <a:p>
+            <a:pPr algn="ctr"/>
+          </a:p>
+        </p:txBody>
+      </p:sp>
+      <p:sp>
+        <p:nvSpPr>
+          <p:cNvPr id="98" name="Rectangle 97"/>
+          <p:cNvSpPr/>
+          <p:nvPr/>
+        </p:nvSpPr>
+        <p:spPr>
+          <a:xfrm>
+            <a:off x="3547872" y="3383279"/>
+            <a:ext cx="109728" cy="10972"/>
+          </a:xfrm>
+          <a:prstGeom prst="rect">
+            <a:avLst/>
+          </a:prstGeom>
+          <a:solidFill>
+            <a:srgbClr val="8FA9C6"/>
+          </a:solidFill>
+          <a:ln>
+            <a:noFill/>
+          </a:ln>
+          <a:effectLst/>
+        </p:spPr>
+        <p:style>
+          <a:lnRef idx="1">
+            <a:schemeClr val="accent1"/>
+          </a:lnRef>
+          <a:fillRef idx="3">
+            <a:schemeClr val="accent1"/>
+          </a:fillRef>
+          <a:effectRef idx="2">
+            <a:schemeClr val="accent1"/>
+          </a:effectRef>
+          <a:fontRef idx="minor">
+            <a:schemeClr val="lt1"/>
+          </a:fontRef>
+        </p:style>
+        <p:txBody>
+          <a:bodyPr rtlCol="0" anchor="ctr"/>
+          <a:lstStyle/>
+          <a:p>
+            <a:pPr algn="ctr"/>
+          </a:p>
+        </p:txBody>
+      </p:sp>
+      <p:sp>
+        <p:nvSpPr>
+          <p:cNvPr id="99" name="Oval 98"/>
+          <p:cNvSpPr/>
+          <p:nvPr/>
+        </p:nvSpPr>
+        <p:spPr>
+          <a:xfrm>
+            <a:off x="3657600" y="3360419"/>
+            <a:ext cx="50292" cy="50292"/>
+          </a:xfrm>
+          <a:prstGeom prst="ellipse">
+            <a:avLst/>
+          </a:prstGeom>
+          <a:solidFill>
+            <a:srgbClr val="1F5C99"/>
+          </a:solidFill>
+          <a:ln>
+            <a:noFill/>
+          </a:ln>
+          <a:effectLst/>
+        </p:spPr>
+        <p:style>
+          <a:lnRef idx="1">
+            <a:schemeClr val="accent1"/>
+          </a:lnRef>
+          <a:fillRef idx="3">
+            <a:schemeClr val="accent1"/>
+          </a:fillRef>
+          <a:effectRef idx="2">
+            <a:schemeClr val="accent1"/>
+          </a:effectRef>
+          <a:fontRef idx="minor">
+            <a:schemeClr val="lt1"/>
+          </a:fontRef>
+        </p:style>
+        <p:txBody>
+          <a:bodyPr rtlCol="0" anchor="ctr"/>
+          <a:lstStyle/>
+          <a:p>
+            <a:pPr algn="ctr"/>
+          </a:p>
+        </p:txBody>
+      </p:sp>
+      <p:sp>
+        <p:nvSpPr>
+          <p:cNvPr id="100" name="TextBox 99"/>
+          <p:cNvSpPr txBox="1"/>
+          <p:nvPr/>
+        </p:nvSpPr>
+        <p:spPr>
+          <a:xfrm>
+            <a:off x="3749040" y="3319271"/>
+            <a:ext cx="2130552" cy="265176"/>
+          </a:xfrm>
+          <a:prstGeom prst="rect">
+            <a:avLst/>
+          </a:prstGeom>
+          <a:noFill/>
+        </p:spPr>
+        <p:txBody>
+          <a:bodyPr wrap="square" lIns="0" rIns="0" tIns="0" bIns="0" anchor="t">
+            <a:spAutoFit/>
+          </a:bodyPr>
+          <a:lstStyle/>
+          <a:p>
+            <a:pPr algn="l"/>
+            <a:r>
+              <a:rPr sz="900" b="0">
                 <a:solidFill>
                   <a:srgbClr val="1B2733"/>
                 </a:solidFill>
-                <a:latin typeface="Calibri" pitchFamily="34" charset="0"/>
-                <a:ea typeface="Calibri" pitchFamily="34" charset="-122"/>
-                <a:cs typeface="Calibri" pitchFamily="34" charset="-120"/>
-              </a:rPr>
-              <a:t>Monitoreo semanal de la reserva de saneamiento</a:t>
-            </a:r>
-            <a:endParaRPr lang="en-US" sz="1050" dirty="0"/>
-          </a:p>
-          <a:p>
-            <a:pPr marL="152400" indent="-152400">
-              <a:spcAft>
-                <a:spcPts val="200"/>
-              </a:spcAft>
-              <a:buSzPct val="100000"/>
-              <a:buChar char="•"/>
-            </a:pPr>
-            <a:r>
-              <a:rPr lang="en-US" sz="1050" dirty="0">
+                <a:latin typeface="Calibri"/>
+              </a:rPr>
+              <a:t>Informe de segunda prueba de Continuidad del Negocio realizada el 01.10.2026</a:t>
+            </a:r>
+          </a:p>
+        </p:txBody>
+      </p:sp>
+      <p:sp>
+        <p:nvSpPr>
+          <p:cNvPr id="101" name="Rounded Rectangle 100"/>
+          <p:cNvSpPr/>
+          <p:nvPr/>
+        </p:nvSpPr>
+        <p:spPr>
+          <a:xfrm>
+            <a:off x="3419856" y="3639311"/>
+            <a:ext cx="2496312" cy="196596"/>
+          </a:xfrm>
+          <a:prstGeom prst="roundRect">
+            <a:avLst>
+              <a:gd name="adj" fmla="val 20000"/>
+            </a:avLst>
+          </a:prstGeom>
+          <a:solidFill>
+            <a:srgbClr val="DCE8F5"/>
+          </a:solidFill>
+          <a:ln>
+            <a:noFill/>
+          </a:ln>
+          <a:effectLst/>
+        </p:spPr>
+        <p:style>
+          <a:lnRef idx="1">
+            <a:schemeClr val="accent1"/>
+          </a:lnRef>
+          <a:fillRef idx="3">
+            <a:schemeClr val="accent1"/>
+          </a:fillRef>
+          <a:effectRef idx="2">
+            <a:schemeClr val="accent1"/>
+          </a:effectRef>
+          <a:fontRef idx="minor">
+            <a:schemeClr val="lt1"/>
+          </a:fontRef>
+        </p:style>
+        <p:txBody>
+          <a:bodyPr rtlCol="0" anchor="ctr"/>
+          <a:lstStyle/>
+          <a:p>
+            <a:pPr algn="ctr"/>
+          </a:p>
+        </p:txBody>
+      </p:sp>
+      <p:sp>
+        <p:nvSpPr>
+          <p:cNvPr id="102" name="TextBox 101"/>
+          <p:cNvSpPr txBox="1"/>
+          <p:nvPr/>
+        </p:nvSpPr>
+        <p:spPr>
+          <a:xfrm>
+            <a:off x="3511296" y="3666744"/>
+            <a:ext cx="2313432" cy="141732"/>
+          </a:xfrm>
+          <a:prstGeom prst="rect">
+            <a:avLst/>
+          </a:prstGeom>
+          <a:noFill/>
+        </p:spPr>
+        <p:txBody>
+          <a:bodyPr wrap="square" lIns="0" rIns="0" tIns="0" bIns="0" anchor="t">
+            <a:spAutoFit/>
+          </a:bodyPr>
+          <a:lstStyle/>
+          <a:p>
+            <a:pPr algn="l"/>
+            <a:r>
+              <a:rPr sz="950" b="1">
+                <a:solidFill>
+                  <a:srgbClr val="0B2545"/>
+                </a:solidFill>
+                <a:latin typeface="Calibri"/>
+              </a:rPr>
+              <a:t>3. Actualización Matriz BIA</a:t>
+            </a:r>
+          </a:p>
+        </p:txBody>
+      </p:sp>
+      <p:sp>
+        <p:nvSpPr>
+          <p:cNvPr id="103" name="Rounded Rectangle 102"/>
+          <p:cNvSpPr/>
+          <p:nvPr/>
+        </p:nvSpPr>
+        <p:spPr>
+          <a:xfrm>
+            <a:off x="3419856" y="3890771"/>
+            <a:ext cx="2496312" cy="338328"/>
+          </a:xfrm>
+          <a:prstGeom prst="roundRect">
+            <a:avLst>
+              <a:gd name="adj" fmla="val 20000"/>
+            </a:avLst>
+          </a:prstGeom>
+          <a:solidFill>
+            <a:srgbClr val="DCE8F5"/>
+          </a:solidFill>
+          <a:ln>
+            <a:noFill/>
+          </a:ln>
+          <a:effectLst/>
+        </p:spPr>
+        <p:style>
+          <a:lnRef idx="1">
+            <a:schemeClr val="accent1"/>
+          </a:lnRef>
+          <a:fillRef idx="3">
+            <a:schemeClr val="accent1"/>
+          </a:fillRef>
+          <a:effectRef idx="2">
+            <a:schemeClr val="accent1"/>
+          </a:effectRef>
+          <a:fontRef idx="minor">
+            <a:schemeClr val="lt1"/>
+          </a:fontRef>
+        </p:style>
+        <p:txBody>
+          <a:bodyPr rtlCol="0" anchor="ctr"/>
+          <a:lstStyle/>
+          <a:p>
+            <a:pPr algn="ctr"/>
+          </a:p>
+        </p:txBody>
+      </p:sp>
+      <p:sp>
+        <p:nvSpPr>
+          <p:cNvPr id="104" name="TextBox 103"/>
+          <p:cNvSpPr txBox="1"/>
+          <p:nvPr/>
+        </p:nvSpPr>
+        <p:spPr>
+          <a:xfrm>
+            <a:off x="3511296" y="3918203"/>
+            <a:ext cx="2313432" cy="283464"/>
+          </a:xfrm>
+          <a:prstGeom prst="rect">
+            <a:avLst/>
+          </a:prstGeom>
+          <a:noFill/>
+        </p:spPr>
+        <p:txBody>
+          <a:bodyPr wrap="square" lIns="0" rIns="0" tIns="0" bIns="0" anchor="t">
+            <a:spAutoFit/>
+          </a:bodyPr>
+          <a:lstStyle/>
+          <a:p>
+            <a:pPr algn="l"/>
+            <a:r>
+              <a:rPr sz="950" b="1">
+                <a:solidFill>
+                  <a:srgbClr val="0B2545"/>
+                </a:solidFill>
+                <a:latin typeface="Calibri"/>
+              </a:rPr>
+              <a:t>4. Seguimiento planes de acción Matriz de Riesgos Institucional 2026</a:t>
+            </a:r>
+          </a:p>
+        </p:txBody>
+      </p:sp>
+      <p:sp>
+        <p:nvSpPr>
+          <p:cNvPr id="105" name="Rounded Rectangle 104"/>
+          <p:cNvSpPr/>
+          <p:nvPr/>
+        </p:nvSpPr>
+        <p:spPr>
+          <a:xfrm>
+            <a:off x="3419856" y="4283963"/>
+            <a:ext cx="2496312" cy="338328"/>
+          </a:xfrm>
+          <a:prstGeom prst="roundRect">
+            <a:avLst>
+              <a:gd name="adj" fmla="val 20000"/>
+            </a:avLst>
+          </a:prstGeom>
+          <a:solidFill>
+            <a:srgbClr val="DCE8F5"/>
+          </a:solidFill>
+          <a:ln>
+            <a:noFill/>
+          </a:ln>
+          <a:effectLst/>
+        </p:spPr>
+        <p:style>
+          <a:lnRef idx="1">
+            <a:schemeClr val="accent1"/>
+          </a:lnRef>
+          <a:fillRef idx="3">
+            <a:schemeClr val="accent1"/>
+          </a:fillRef>
+          <a:effectRef idx="2">
+            <a:schemeClr val="accent1"/>
+          </a:effectRef>
+          <a:fontRef idx="minor">
+            <a:schemeClr val="lt1"/>
+          </a:fontRef>
+        </p:style>
+        <p:txBody>
+          <a:bodyPr rtlCol="0" anchor="ctr"/>
+          <a:lstStyle/>
+          <a:p>
+            <a:pPr algn="ctr"/>
+          </a:p>
+        </p:txBody>
+      </p:sp>
+      <p:sp>
+        <p:nvSpPr>
+          <p:cNvPr id="106" name="TextBox 105"/>
+          <p:cNvSpPr txBox="1"/>
+          <p:nvPr/>
+        </p:nvSpPr>
+        <p:spPr>
+          <a:xfrm>
+            <a:off x="3511296" y="4311395"/>
+            <a:ext cx="2313432" cy="283464"/>
+          </a:xfrm>
+          <a:prstGeom prst="rect">
+            <a:avLst/>
+          </a:prstGeom>
+          <a:noFill/>
+        </p:spPr>
+        <p:txBody>
+          <a:bodyPr wrap="square" lIns="0" rIns="0" tIns="0" bIns="0" anchor="t">
+            <a:spAutoFit/>
+          </a:bodyPr>
+          <a:lstStyle/>
+          <a:p>
+            <a:pPr algn="l"/>
+            <a:r>
+              <a:rPr sz="950" b="1">
+                <a:solidFill>
+                  <a:srgbClr val="0B2545"/>
+                </a:solidFill>
+                <a:latin typeface="Calibri"/>
+              </a:rPr>
+              <a:t>5. Seguimiento eventos de riesgos por caídas de TC 25.09.2026 y Orion 26.09.2026</a:t>
+            </a:r>
+          </a:p>
+        </p:txBody>
+      </p:sp>
+      <p:sp>
+        <p:nvSpPr>
+          <p:cNvPr id="107" name="Rounded Rectangle 106"/>
+          <p:cNvSpPr/>
+          <p:nvPr/>
+        </p:nvSpPr>
+        <p:spPr>
+          <a:xfrm>
+            <a:off x="6163056" y="2441448"/>
+            <a:ext cx="2715768" cy="4096512"/>
+          </a:xfrm>
+          <a:prstGeom prst="roundRect">
+            <a:avLst>
+              <a:gd name="adj" fmla="val 4000"/>
+            </a:avLst>
+          </a:prstGeom>
+          <a:solidFill>
+            <a:srgbClr val="EEF2F7"/>
+          </a:solidFill>
+          <a:ln>
+            <a:noFill/>
+          </a:ln>
+          <a:effectLst/>
+        </p:spPr>
+        <p:style>
+          <a:lnRef idx="1">
+            <a:schemeClr val="accent1"/>
+          </a:lnRef>
+          <a:fillRef idx="3">
+            <a:schemeClr val="accent1"/>
+          </a:fillRef>
+          <a:effectRef idx="2">
+            <a:schemeClr val="accent1"/>
+          </a:effectRef>
+          <a:fontRef idx="minor">
+            <a:schemeClr val="lt1"/>
+          </a:fontRef>
+        </p:style>
+        <p:txBody>
+          <a:bodyPr rtlCol="0" anchor="ctr"/>
+          <a:lstStyle/>
+          <a:p>
+            <a:pPr algn="ctr"/>
+          </a:p>
+        </p:txBody>
+      </p:sp>
+      <p:sp>
+        <p:nvSpPr>
+          <p:cNvPr id="108" name="Rounded Rectangle 107"/>
+          <p:cNvSpPr/>
+          <p:nvPr/>
+        </p:nvSpPr>
+        <p:spPr>
+          <a:xfrm>
+            <a:off x="6272784" y="2551176"/>
+            <a:ext cx="2496312" cy="196596"/>
+          </a:xfrm>
+          <a:prstGeom prst="roundRect">
+            <a:avLst>
+              <a:gd name="adj" fmla="val 20000"/>
+            </a:avLst>
+          </a:prstGeom>
+          <a:solidFill>
+            <a:srgbClr val="DCE8F5"/>
+          </a:solidFill>
+          <a:ln>
+            <a:noFill/>
+          </a:ln>
+          <a:effectLst/>
+        </p:spPr>
+        <p:style>
+          <a:lnRef idx="1">
+            <a:schemeClr val="accent1"/>
+          </a:lnRef>
+          <a:fillRef idx="3">
+            <a:schemeClr val="accent1"/>
+          </a:fillRef>
+          <a:effectRef idx="2">
+            <a:schemeClr val="accent1"/>
+          </a:effectRef>
+          <a:fontRef idx="minor">
+            <a:schemeClr val="lt1"/>
+          </a:fontRef>
+        </p:style>
+        <p:txBody>
+          <a:bodyPr rtlCol="0" anchor="ctr"/>
+          <a:lstStyle/>
+          <a:p>
+            <a:pPr algn="ctr"/>
+          </a:p>
+        </p:txBody>
+      </p:sp>
+      <p:sp>
+        <p:nvSpPr>
+          <p:cNvPr id="109" name="TextBox 108"/>
+          <p:cNvSpPr txBox="1"/>
+          <p:nvPr/>
+        </p:nvSpPr>
+        <p:spPr>
+          <a:xfrm>
+            <a:off x="6364224" y="2578608"/>
+            <a:ext cx="2313432" cy="141732"/>
+          </a:xfrm>
+          <a:prstGeom prst="rect">
+            <a:avLst/>
+          </a:prstGeom>
+          <a:noFill/>
+        </p:spPr>
+        <p:txBody>
+          <a:bodyPr wrap="square" lIns="0" rIns="0" tIns="0" bIns="0" anchor="t">
+            <a:spAutoFit/>
+          </a:bodyPr>
+          <a:lstStyle/>
+          <a:p>
+            <a:pPr algn="l"/>
+            <a:r>
+              <a:rPr sz="950" b="1">
+                <a:solidFill>
+                  <a:srgbClr val="0B2545"/>
+                </a:solidFill>
+                <a:latin typeface="Calibri"/>
+              </a:rPr>
+              <a:t>1. Revisión de Política de Avalúos</a:t>
+            </a:r>
+          </a:p>
+        </p:txBody>
+      </p:sp>
+      <p:sp>
+        <p:nvSpPr>
+          <p:cNvPr id="110" name="Rectangle 109"/>
+          <p:cNvSpPr/>
+          <p:nvPr/>
+        </p:nvSpPr>
+        <p:spPr>
+          <a:xfrm>
+            <a:off x="6400800" y="2747772"/>
+            <a:ext cx="10972" cy="690371"/>
+          </a:xfrm>
+          <a:prstGeom prst="rect">
+            <a:avLst/>
+          </a:prstGeom>
+          <a:solidFill>
+            <a:srgbClr val="8FA9C6"/>
+          </a:solidFill>
+          <a:ln>
+            <a:noFill/>
+          </a:ln>
+          <a:effectLst/>
+        </p:spPr>
+        <p:style>
+          <a:lnRef idx="1">
+            <a:schemeClr val="accent1"/>
+          </a:lnRef>
+          <a:fillRef idx="3">
+            <a:schemeClr val="accent1"/>
+          </a:fillRef>
+          <a:effectRef idx="2">
+            <a:schemeClr val="accent1"/>
+          </a:effectRef>
+          <a:fontRef idx="minor">
+            <a:schemeClr val="lt1"/>
+          </a:fontRef>
+        </p:style>
+        <p:txBody>
+          <a:bodyPr rtlCol="0" anchor="ctr"/>
+          <a:lstStyle/>
+          <a:p>
+            <a:pPr algn="ctr"/>
+          </a:p>
+        </p:txBody>
+      </p:sp>
+      <p:sp>
+        <p:nvSpPr>
+          <p:cNvPr id="111" name="Rectangle 110"/>
+          <p:cNvSpPr/>
+          <p:nvPr/>
+        </p:nvSpPr>
+        <p:spPr>
+          <a:xfrm>
+            <a:off x="6400800" y="2839211"/>
+            <a:ext cx="109728" cy="10972"/>
+          </a:xfrm>
+          <a:prstGeom prst="rect">
+            <a:avLst/>
+          </a:prstGeom>
+          <a:solidFill>
+            <a:srgbClr val="8FA9C6"/>
+          </a:solidFill>
+          <a:ln>
+            <a:noFill/>
+          </a:ln>
+          <a:effectLst/>
+        </p:spPr>
+        <p:style>
+          <a:lnRef idx="1">
+            <a:schemeClr val="accent1"/>
+          </a:lnRef>
+          <a:fillRef idx="3">
+            <a:schemeClr val="accent1"/>
+          </a:fillRef>
+          <a:effectRef idx="2">
+            <a:schemeClr val="accent1"/>
+          </a:effectRef>
+          <a:fontRef idx="minor">
+            <a:schemeClr val="lt1"/>
+          </a:fontRef>
+        </p:style>
+        <p:txBody>
+          <a:bodyPr rtlCol="0" anchor="ctr"/>
+          <a:lstStyle/>
+          <a:p>
+            <a:pPr algn="ctr"/>
+          </a:p>
+        </p:txBody>
+      </p:sp>
+      <p:sp>
+        <p:nvSpPr>
+          <p:cNvPr id="112" name="Oval 111"/>
+          <p:cNvSpPr/>
+          <p:nvPr/>
+        </p:nvSpPr>
+        <p:spPr>
+          <a:xfrm>
+            <a:off x="6510528" y="2816351"/>
+            <a:ext cx="50292" cy="50292"/>
+          </a:xfrm>
+          <a:prstGeom prst="ellipse">
+            <a:avLst/>
+          </a:prstGeom>
+          <a:solidFill>
+            <a:srgbClr val="1F5C99"/>
+          </a:solidFill>
+          <a:ln>
+            <a:noFill/>
+          </a:ln>
+          <a:effectLst/>
+        </p:spPr>
+        <p:style>
+          <a:lnRef idx="1">
+            <a:schemeClr val="accent1"/>
+          </a:lnRef>
+          <a:fillRef idx="3">
+            <a:schemeClr val="accent1"/>
+          </a:fillRef>
+          <a:effectRef idx="2">
+            <a:schemeClr val="accent1"/>
+          </a:effectRef>
+          <a:fontRef idx="minor">
+            <a:schemeClr val="lt1"/>
+          </a:fontRef>
+        </p:style>
+        <p:txBody>
+          <a:bodyPr rtlCol="0" anchor="ctr"/>
+          <a:lstStyle/>
+          <a:p>
+            <a:pPr algn="ctr"/>
+          </a:p>
+        </p:txBody>
+      </p:sp>
+      <p:sp>
+        <p:nvSpPr>
+          <p:cNvPr id="113" name="TextBox 112"/>
+          <p:cNvSpPr txBox="1"/>
+          <p:nvPr/>
+        </p:nvSpPr>
+        <p:spPr>
+          <a:xfrm>
+            <a:off x="6601968" y="2775203"/>
+            <a:ext cx="2130552" cy="265176"/>
+          </a:xfrm>
+          <a:prstGeom prst="rect">
+            <a:avLst/>
+          </a:prstGeom>
+          <a:noFill/>
+        </p:spPr>
+        <p:txBody>
+          <a:bodyPr wrap="square" lIns="0" rIns="0" tIns="0" bIns="0" anchor="t">
+            <a:spAutoFit/>
+          </a:bodyPr>
+          <a:lstStyle/>
+          <a:p>
+            <a:pPr algn="l"/>
+            <a:r>
+              <a:rPr sz="900" b="0">
                 <a:solidFill>
                   <a:srgbClr val="1B2733"/>
                 </a:solidFill>
-                <a:latin typeface="Calibri" pitchFamily="34" charset="0"/>
-                <a:ea typeface="Calibri" pitchFamily="34" charset="-122"/>
-                <a:cs typeface="Calibri" pitchFamily="34" charset="-120"/>
-              </a:rPr>
-              <a:t>Registro permanente de los traslados de deuda</a:t>
-            </a:r>
-            <a:endParaRPr lang="en-US" sz="1050" dirty="0"/>
-          </a:p>
-          <a:p>
-            <a:pPr marL="152400" indent="-152400">
-              <a:spcAft>
-                <a:spcPts val="200"/>
-              </a:spcAft>
-              <a:buSzPct val="100000"/>
-              <a:buChar char="•"/>
-            </a:pPr>
-            <a:r>
-              <a:rPr lang="en-US" sz="1050" dirty="0">
+                <a:latin typeface="Calibri"/>
+              </a:rPr>
+              <a:t>Revisión de Procedimientos de Administración de Avalúos</a:t>
+            </a:r>
+          </a:p>
+        </p:txBody>
+      </p:sp>
+      <p:sp>
+        <p:nvSpPr>
+          <p:cNvPr id="114" name="Rectangle 113"/>
+          <p:cNvSpPr/>
+          <p:nvPr/>
+        </p:nvSpPr>
+        <p:spPr>
+          <a:xfrm>
+            <a:off x="6400800" y="3104387"/>
+            <a:ext cx="109728" cy="10972"/>
+          </a:xfrm>
+          <a:prstGeom prst="rect">
+            <a:avLst/>
+          </a:prstGeom>
+          <a:solidFill>
+            <a:srgbClr val="8FA9C6"/>
+          </a:solidFill>
+          <a:ln>
+            <a:noFill/>
+          </a:ln>
+          <a:effectLst/>
+        </p:spPr>
+        <p:style>
+          <a:lnRef idx="1">
+            <a:schemeClr val="accent1"/>
+          </a:lnRef>
+          <a:fillRef idx="3">
+            <a:schemeClr val="accent1"/>
+          </a:fillRef>
+          <a:effectRef idx="2">
+            <a:schemeClr val="accent1"/>
+          </a:effectRef>
+          <a:fontRef idx="minor">
+            <a:schemeClr val="lt1"/>
+          </a:fontRef>
+        </p:style>
+        <p:txBody>
+          <a:bodyPr rtlCol="0" anchor="ctr"/>
+          <a:lstStyle/>
+          <a:p>
+            <a:pPr algn="ctr"/>
+          </a:p>
+        </p:txBody>
+      </p:sp>
+      <p:sp>
+        <p:nvSpPr>
+          <p:cNvPr id="115" name="Oval 114"/>
+          <p:cNvSpPr/>
+          <p:nvPr/>
+        </p:nvSpPr>
+        <p:spPr>
+          <a:xfrm>
+            <a:off x="6510528" y="3081527"/>
+            <a:ext cx="50292" cy="50292"/>
+          </a:xfrm>
+          <a:prstGeom prst="ellipse">
+            <a:avLst/>
+          </a:prstGeom>
+          <a:solidFill>
+            <a:srgbClr val="1F5C99"/>
+          </a:solidFill>
+          <a:ln>
+            <a:noFill/>
+          </a:ln>
+          <a:effectLst/>
+        </p:spPr>
+        <p:style>
+          <a:lnRef idx="1">
+            <a:schemeClr val="accent1"/>
+          </a:lnRef>
+          <a:fillRef idx="3">
+            <a:schemeClr val="accent1"/>
+          </a:fillRef>
+          <a:effectRef idx="2">
+            <a:schemeClr val="accent1"/>
+          </a:effectRef>
+          <a:fontRef idx="minor">
+            <a:schemeClr val="lt1"/>
+          </a:fontRef>
+        </p:style>
+        <p:txBody>
+          <a:bodyPr rtlCol="0" anchor="ctr"/>
+          <a:lstStyle/>
+          <a:p>
+            <a:pPr algn="ctr"/>
+          </a:p>
+        </p:txBody>
+      </p:sp>
+      <p:sp>
+        <p:nvSpPr>
+          <p:cNvPr id="116" name="TextBox 115"/>
+          <p:cNvSpPr txBox="1"/>
+          <p:nvPr/>
+        </p:nvSpPr>
+        <p:spPr>
+          <a:xfrm>
+            <a:off x="6601968" y="3040379"/>
+            <a:ext cx="2130552" cy="132588"/>
+          </a:xfrm>
+          <a:prstGeom prst="rect">
+            <a:avLst/>
+          </a:prstGeom>
+          <a:noFill/>
+        </p:spPr>
+        <p:txBody>
+          <a:bodyPr wrap="square" lIns="0" rIns="0" tIns="0" bIns="0" anchor="t">
+            <a:spAutoFit/>
+          </a:bodyPr>
+          <a:lstStyle/>
+          <a:p>
+            <a:pPr algn="l"/>
+            <a:r>
+              <a:rPr sz="900" b="0">
                 <a:solidFill>
                   <a:srgbClr val="1B2733"/>
                 </a:solidFill>
-                <a:latin typeface="Calibri" pitchFamily="34" charset="0"/>
-                <a:ea typeface="Calibri" pitchFamily="34" charset="-122"/>
-                <a:cs typeface="Calibri" pitchFamily="34" charset="-120"/>
-              </a:rPr>
-              <a:t>Seguimiento acuerdos del Consejo de Administración</a:t>
-            </a:r>
-            <a:endParaRPr lang="en-US" sz="1050" dirty="0"/>
+                <a:latin typeface="Calibri"/>
+              </a:rPr>
+              <a:t>Revisión de Perfil de Revisor</a:t>
+            </a:r>
+          </a:p>
+        </p:txBody>
+      </p:sp>
+      <p:sp>
+        <p:nvSpPr>
+          <p:cNvPr id="117" name="Rectangle 116"/>
+          <p:cNvSpPr/>
+          <p:nvPr/>
+        </p:nvSpPr>
+        <p:spPr>
+          <a:xfrm>
+            <a:off x="6400800" y="3236975"/>
+            <a:ext cx="109728" cy="10972"/>
+          </a:xfrm>
+          <a:prstGeom prst="rect">
+            <a:avLst/>
+          </a:prstGeom>
+          <a:solidFill>
+            <a:srgbClr val="8FA9C6"/>
+          </a:solidFill>
+          <a:ln>
+            <a:noFill/>
+          </a:ln>
+          <a:effectLst/>
+        </p:spPr>
+        <p:style>
+          <a:lnRef idx="1">
+            <a:schemeClr val="accent1"/>
+          </a:lnRef>
+          <a:fillRef idx="3">
+            <a:schemeClr val="accent1"/>
+          </a:fillRef>
+          <a:effectRef idx="2">
+            <a:schemeClr val="accent1"/>
+          </a:effectRef>
+          <a:fontRef idx="minor">
+            <a:schemeClr val="lt1"/>
+          </a:fontRef>
+        </p:style>
+        <p:txBody>
+          <a:bodyPr rtlCol="0" anchor="ctr"/>
+          <a:lstStyle/>
+          <a:p>
+            <a:pPr algn="ctr"/>
+          </a:p>
+        </p:txBody>
+      </p:sp>
+      <p:sp>
+        <p:nvSpPr>
+          <p:cNvPr id="118" name="Oval 117"/>
+          <p:cNvSpPr/>
+          <p:nvPr/>
+        </p:nvSpPr>
+        <p:spPr>
+          <a:xfrm>
+            <a:off x="6510528" y="3214115"/>
+            <a:ext cx="50292" cy="50292"/>
+          </a:xfrm>
+          <a:prstGeom prst="ellipse">
+            <a:avLst/>
+          </a:prstGeom>
+          <a:solidFill>
+            <a:srgbClr val="1F5C99"/>
+          </a:solidFill>
+          <a:ln>
+            <a:noFill/>
+          </a:ln>
+          <a:effectLst/>
+        </p:spPr>
+        <p:style>
+          <a:lnRef idx="1">
+            <a:schemeClr val="accent1"/>
+          </a:lnRef>
+          <a:fillRef idx="3">
+            <a:schemeClr val="accent1"/>
+          </a:fillRef>
+          <a:effectRef idx="2">
+            <a:schemeClr val="accent1"/>
+          </a:effectRef>
+          <a:fontRef idx="minor">
+            <a:schemeClr val="lt1"/>
+          </a:fontRef>
+        </p:style>
+        <p:txBody>
+          <a:bodyPr rtlCol="0" anchor="ctr"/>
+          <a:lstStyle/>
+          <a:p>
+            <a:pPr algn="ctr"/>
+          </a:p>
+        </p:txBody>
+      </p:sp>
+      <p:sp>
+        <p:nvSpPr>
+          <p:cNvPr id="119" name="TextBox 118"/>
+          <p:cNvSpPr txBox="1"/>
+          <p:nvPr/>
+        </p:nvSpPr>
+        <p:spPr>
+          <a:xfrm>
+            <a:off x="6601968" y="3172968"/>
+            <a:ext cx="2130552" cy="132588"/>
+          </a:xfrm>
+          <a:prstGeom prst="rect">
+            <a:avLst/>
+          </a:prstGeom>
+          <a:noFill/>
+        </p:spPr>
+        <p:txBody>
+          <a:bodyPr wrap="square" lIns="0" rIns="0" tIns="0" bIns="0" anchor="t">
+            <a:spAutoFit/>
+          </a:bodyPr>
+          <a:lstStyle/>
+          <a:p>
+            <a:pPr algn="l"/>
+            <a:r>
+              <a:rPr sz="900" b="0">
+                <a:solidFill>
+                  <a:srgbClr val="1B2733"/>
+                </a:solidFill>
+                <a:latin typeface="Calibri"/>
+              </a:rPr>
+              <a:t>Asignación a perito valuador</a:t>
+            </a:r>
+          </a:p>
+        </p:txBody>
+      </p:sp>
+      <p:sp>
+        <p:nvSpPr>
+          <p:cNvPr id="120" name="Rectangle 119"/>
+          <p:cNvSpPr/>
+          <p:nvPr/>
+        </p:nvSpPr>
+        <p:spPr>
+          <a:xfrm>
+            <a:off x="6400800" y="3369563"/>
+            <a:ext cx="109728" cy="10972"/>
+          </a:xfrm>
+          <a:prstGeom prst="rect">
+            <a:avLst/>
+          </a:prstGeom>
+          <a:solidFill>
+            <a:srgbClr val="8FA9C6"/>
+          </a:solidFill>
+          <a:ln>
+            <a:noFill/>
+          </a:ln>
+          <a:effectLst/>
+        </p:spPr>
+        <p:style>
+          <a:lnRef idx="1">
+            <a:schemeClr val="accent1"/>
+          </a:lnRef>
+          <a:fillRef idx="3">
+            <a:schemeClr val="accent1"/>
+          </a:fillRef>
+          <a:effectRef idx="2">
+            <a:schemeClr val="accent1"/>
+          </a:effectRef>
+          <a:fontRef idx="minor">
+            <a:schemeClr val="lt1"/>
+          </a:fontRef>
+        </p:style>
+        <p:txBody>
+          <a:bodyPr rtlCol="0" anchor="ctr"/>
+          <a:lstStyle/>
+          <a:p>
+            <a:pPr algn="ctr"/>
+          </a:p>
+        </p:txBody>
+      </p:sp>
+      <p:sp>
+        <p:nvSpPr>
+          <p:cNvPr id="121" name="Oval 120"/>
+          <p:cNvSpPr/>
+          <p:nvPr/>
+        </p:nvSpPr>
+        <p:spPr>
+          <a:xfrm>
+            <a:off x="6510528" y="3346703"/>
+            <a:ext cx="50292" cy="50292"/>
+          </a:xfrm>
+          <a:prstGeom prst="ellipse">
+            <a:avLst/>
+          </a:prstGeom>
+          <a:solidFill>
+            <a:srgbClr val="1F5C99"/>
+          </a:solidFill>
+          <a:ln>
+            <a:noFill/>
+          </a:ln>
+          <a:effectLst/>
+        </p:spPr>
+        <p:style>
+          <a:lnRef idx="1">
+            <a:schemeClr val="accent1"/>
+          </a:lnRef>
+          <a:fillRef idx="3">
+            <a:schemeClr val="accent1"/>
+          </a:fillRef>
+          <a:effectRef idx="2">
+            <a:schemeClr val="accent1"/>
+          </a:effectRef>
+          <a:fontRef idx="minor">
+            <a:schemeClr val="lt1"/>
+          </a:fontRef>
+        </p:style>
+        <p:txBody>
+          <a:bodyPr rtlCol="0" anchor="ctr"/>
+          <a:lstStyle/>
+          <a:p>
+            <a:pPr algn="ctr"/>
+          </a:p>
+        </p:txBody>
+      </p:sp>
+      <p:sp>
+        <p:nvSpPr>
+          <p:cNvPr id="122" name="TextBox 121"/>
+          <p:cNvSpPr txBox="1"/>
+          <p:nvPr/>
+        </p:nvSpPr>
+        <p:spPr>
+          <a:xfrm>
+            <a:off x="6601968" y="3305556"/>
+            <a:ext cx="2130552" cy="265176"/>
+          </a:xfrm>
+          <a:prstGeom prst="rect">
+            <a:avLst/>
+          </a:prstGeom>
+          <a:noFill/>
+        </p:spPr>
+        <p:txBody>
+          <a:bodyPr wrap="square" lIns="0" rIns="0" tIns="0" bIns="0" anchor="t">
+            <a:spAutoFit/>
+          </a:bodyPr>
+          <a:lstStyle/>
+          <a:p>
+            <a:pPr algn="l"/>
+            <a:r>
+              <a:rPr sz="900" b="0">
+                <a:solidFill>
+                  <a:srgbClr val="1B2733"/>
+                </a:solidFill>
+                <a:latin typeface="Calibri"/>
+              </a:rPr>
+              <a:t>Descargo de avalúo anterior y documento mutuo hipotecario</a:t>
+            </a:r>
+          </a:p>
+        </p:txBody>
+      </p:sp>
+      <p:sp>
+        <p:nvSpPr>
+          <p:cNvPr id="123" name="Rounded Rectangle 122"/>
+          <p:cNvSpPr/>
+          <p:nvPr/>
+        </p:nvSpPr>
+        <p:spPr>
+          <a:xfrm>
+            <a:off x="6272784" y="3625596"/>
+            <a:ext cx="2496312" cy="196596"/>
+          </a:xfrm>
+          <a:prstGeom prst="roundRect">
+            <a:avLst>
+              <a:gd name="adj" fmla="val 20000"/>
+            </a:avLst>
+          </a:prstGeom>
+          <a:solidFill>
+            <a:srgbClr val="DCE8F5"/>
+          </a:solidFill>
+          <a:ln>
+            <a:noFill/>
+          </a:ln>
+          <a:effectLst/>
+        </p:spPr>
+        <p:style>
+          <a:lnRef idx="1">
+            <a:schemeClr val="accent1"/>
+          </a:lnRef>
+          <a:fillRef idx="3">
+            <a:schemeClr val="accent1"/>
+          </a:fillRef>
+          <a:effectRef idx="2">
+            <a:schemeClr val="accent1"/>
+          </a:effectRef>
+          <a:fontRef idx="minor">
+            <a:schemeClr val="lt1"/>
+          </a:fontRef>
+        </p:style>
+        <p:txBody>
+          <a:bodyPr rtlCol="0" anchor="ctr"/>
+          <a:lstStyle/>
+          <a:p>
+            <a:pPr algn="ctr"/>
+          </a:p>
+        </p:txBody>
+      </p:sp>
+      <p:sp>
+        <p:nvSpPr>
+          <p:cNvPr id="124" name="TextBox 123"/>
+          <p:cNvSpPr txBox="1"/>
+          <p:nvPr/>
+        </p:nvSpPr>
+        <p:spPr>
+          <a:xfrm>
+            <a:off x="6364224" y="3653027"/>
+            <a:ext cx="2313432" cy="141732"/>
+          </a:xfrm>
+          <a:prstGeom prst="rect">
+            <a:avLst/>
+          </a:prstGeom>
+          <a:noFill/>
+        </p:spPr>
+        <p:txBody>
+          <a:bodyPr wrap="square" lIns="0" rIns="0" tIns="0" bIns="0" anchor="t">
+            <a:spAutoFit/>
+          </a:bodyPr>
+          <a:lstStyle/>
+          <a:p>
+            <a:pPr algn="l"/>
+            <a:r>
+              <a:rPr sz="950" b="1">
+                <a:solidFill>
+                  <a:srgbClr val="0B2545"/>
+                </a:solidFill>
+                <a:latin typeface="Calibri"/>
+              </a:rPr>
+              <a:t>2. Comite de Riesgo</a:t>
+            </a:r>
+          </a:p>
+        </p:txBody>
+      </p:sp>
+      <p:sp>
+        <p:nvSpPr>
+          <p:cNvPr id="125" name="Rectangle 124"/>
+          <p:cNvSpPr/>
+          <p:nvPr/>
+        </p:nvSpPr>
+        <p:spPr>
+          <a:xfrm>
+            <a:off x="6400800" y="3822191"/>
+            <a:ext cx="10972" cy="358902"/>
+          </a:xfrm>
+          <a:prstGeom prst="rect">
+            <a:avLst/>
+          </a:prstGeom>
+          <a:solidFill>
+            <a:srgbClr val="8FA9C6"/>
+          </a:solidFill>
+          <a:ln>
+            <a:noFill/>
+          </a:ln>
+          <a:effectLst/>
+        </p:spPr>
+        <p:style>
+          <a:lnRef idx="1">
+            <a:schemeClr val="accent1"/>
+          </a:lnRef>
+          <a:fillRef idx="3">
+            <a:schemeClr val="accent1"/>
+          </a:fillRef>
+          <a:effectRef idx="2">
+            <a:schemeClr val="accent1"/>
+          </a:effectRef>
+          <a:fontRef idx="minor">
+            <a:schemeClr val="lt1"/>
+          </a:fontRef>
+        </p:style>
+        <p:txBody>
+          <a:bodyPr rtlCol="0" anchor="ctr"/>
+          <a:lstStyle/>
+          <a:p>
+            <a:pPr algn="ctr"/>
+          </a:p>
+        </p:txBody>
+      </p:sp>
+      <p:sp>
+        <p:nvSpPr>
+          <p:cNvPr id="126" name="Rectangle 125"/>
+          <p:cNvSpPr/>
+          <p:nvPr/>
+        </p:nvSpPr>
+        <p:spPr>
+          <a:xfrm>
+            <a:off x="6400800" y="3913632"/>
+            <a:ext cx="109728" cy="10972"/>
+          </a:xfrm>
+          <a:prstGeom prst="rect">
+            <a:avLst/>
+          </a:prstGeom>
+          <a:solidFill>
+            <a:srgbClr val="8FA9C6"/>
+          </a:solidFill>
+          <a:ln>
+            <a:noFill/>
+          </a:ln>
+          <a:effectLst/>
+        </p:spPr>
+        <p:style>
+          <a:lnRef idx="1">
+            <a:schemeClr val="accent1"/>
+          </a:lnRef>
+          <a:fillRef idx="3">
+            <a:schemeClr val="accent1"/>
+          </a:fillRef>
+          <a:effectRef idx="2">
+            <a:schemeClr val="accent1"/>
+          </a:effectRef>
+          <a:fontRef idx="minor">
+            <a:schemeClr val="lt1"/>
+          </a:fontRef>
+        </p:style>
+        <p:txBody>
+          <a:bodyPr rtlCol="0" anchor="ctr"/>
+          <a:lstStyle/>
+          <a:p>
+            <a:pPr algn="ctr"/>
+          </a:p>
+        </p:txBody>
+      </p:sp>
+      <p:sp>
+        <p:nvSpPr>
+          <p:cNvPr id="127" name="Oval 126"/>
+          <p:cNvSpPr/>
+          <p:nvPr/>
+        </p:nvSpPr>
+        <p:spPr>
+          <a:xfrm>
+            <a:off x="6510528" y="3890772"/>
+            <a:ext cx="50292" cy="50292"/>
+          </a:xfrm>
+          <a:prstGeom prst="ellipse">
+            <a:avLst/>
+          </a:prstGeom>
+          <a:solidFill>
+            <a:srgbClr val="1F5C99"/>
+          </a:solidFill>
+          <a:ln>
+            <a:noFill/>
+          </a:ln>
+          <a:effectLst/>
+        </p:spPr>
+        <p:style>
+          <a:lnRef idx="1">
+            <a:schemeClr val="accent1"/>
+          </a:lnRef>
+          <a:fillRef idx="3">
+            <a:schemeClr val="accent1"/>
+          </a:fillRef>
+          <a:effectRef idx="2">
+            <a:schemeClr val="accent1"/>
+          </a:effectRef>
+          <a:fontRef idx="minor">
+            <a:schemeClr val="lt1"/>
+          </a:fontRef>
+        </p:style>
+        <p:txBody>
+          <a:bodyPr rtlCol="0" anchor="ctr"/>
+          <a:lstStyle/>
+          <a:p>
+            <a:pPr algn="ctr"/>
+          </a:p>
+        </p:txBody>
+      </p:sp>
+      <p:sp>
+        <p:nvSpPr>
+          <p:cNvPr id="128" name="TextBox 127"/>
+          <p:cNvSpPr txBox="1"/>
+          <p:nvPr/>
+        </p:nvSpPr>
+        <p:spPr>
+          <a:xfrm>
+            <a:off x="6601968" y="3849624"/>
+            <a:ext cx="2130552" cy="265176"/>
+          </a:xfrm>
+          <a:prstGeom prst="rect">
+            <a:avLst/>
+          </a:prstGeom>
+          <a:noFill/>
+        </p:spPr>
+        <p:txBody>
+          <a:bodyPr wrap="square" lIns="0" rIns="0" tIns="0" bIns="0" anchor="t">
+            <a:spAutoFit/>
+          </a:bodyPr>
+          <a:lstStyle/>
+          <a:p>
+            <a:pPr algn="l"/>
+            <a:r>
+              <a:rPr sz="900" b="0">
+                <a:solidFill>
+                  <a:srgbClr val="1B2733"/>
+                </a:solidFill>
+                <a:latin typeface="Calibri"/>
+              </a:rPr>
+              <a:t>Elaboración de acta de sesión de fecha 29/08/2026 comite de reiesgo</a:t>
+            </a:r>
+          </a:p>
+        </p:txBody>
+      </p:sp>
+      <p:sp>
+        <p:nvSpPr>
+          <p:cNvPr id="129" name="Rectangle 128"/>
+          <p:cNvSpPr/>
+          <p:nvPr/>
+        </p:nvSpPr>
+        <p:spPr>
+          <a:xfrm>
+            <a:off x="6400800" y="4178808"/>
+            <a:ext cx="109728" cy="10972"/>
+          </a:xfrm>
+          <a:prstGeom prst="rect">
+            <a:avLst/>
+          </a:prstGeom>
+          <a:solidFill>
+            <a:srgbClr val="8FA9C6"/>
+          </a:solidFill>
+          <a:ln>
+            <a:noFill/>
+          </a:ln>
+          <a:effectLst/>
+        </p:spPr>
+        <p:style>
+          <a:lnRef idx="1">
+            <a:schemeClr val="accent1"/>
+          </a:lnRef>
+          <a:fillRef idx="3">
+            <a:schemeClr val="accent1"/>
+          </a:fillRef>
+          <a:effectRef idx="2">
+            <a:schemeClr val="accent1"/>
+          </a:effectRef>
+          <a:fontRef idx="minor">
+            <a:schemeClr val="lt1"/>
+          </a:fontRef>
+        </p:style>
+        <p:txBody>
+          <a:bodyPr rtlCol="0" anchor="ctr"/>
+          <a:lstStyle/>
+          <a:p>
+            <a:pPr algn="ctr"/>
+          </a:p>
+        </p:txBody>
+      </p:sp>
+      <p:sp>
+        <p:nvSpPr>
+          <p:cNvPr id="130" name="Oval 129"/>
+          <p:cNvSpPr/>
+          <p:nvPr/>
+        </p:nvSpPr>
+        <p:spPr>
+          <a:xfrm>
+            <a:off x="6510528" y="4155948"/>
+            <a:ext cx="50292" cy="50292"/>
+          </a:xfrm>
+          <a:prstGeom prst="ellipse">
+            <a:avLst/>
+          </a:prstGeom>
+          <a:solidFill>
+            <a:srgbClr val="1F5C99"/>
+          </a:solidFill>
+          <a:ln>
+            <a:noFill/>
+          </a:ln>
+          <a:effectLst/>
+        </p:spPr>
+        <p:style>
+          <a:lnRef idx="1">
+            <a:schemeClr val="accent1"/>
+          </a:lnRef>
+          <a:fillRef idx="3">
+            <a:schemeClr val="accent1"/>
+          </a:fillRef>
+          <a:effectRef idx="2">
+            <a:schemeClr val="accent1"/>
+          </a:effectRef>
+          <a:fontRef idx="minor">
+            <a:schemeClr val="lt1"/>
+          </a:fontRef>
+        </p:style>
+        <p:txBody>
+          <a:bodyPr rtlCol="0" anchor="ctr"/>
+          <a:lstStyle/>
+          <a:p>
+            <a:pPr algn="ctr"/>
+          </a:p>
+        </p:txBody>
+      </p:sp>
+      <p:sp>
+        <p:nvSpPr>
+          <p:cNvPr id="131" name="TextBox 130"/>
+          <p:cNvSpPr txBox="1"/>
+          <p:nvPr/>
+        </p:nvSpPr>
+        <p:spPr>
+          <a:xfrm>
+            <a:off x="6601968" y="4114800"/>
+            <a:ext cx="2130552" cy="132588"/>
+          </a:xfrm>
+          <a:prstGeom prst="rect">
+            <a:avLst/>
+          </a:prstGeom>
+          <a:noFill/>
+        </p:spPr>
+        <p:txBody>
+          <a:bodyPr wrap="square" lIns="0" rIns="0" tIns="0" bIns="0" anchor="t">
+            <a:spAutoFit/>
+          </a:bodyPr>
+          <a:lstStyle/>
+          <a:p>
+            <a:pPr algn="l"/>
+            <a:r>
+              <a:rPr sz="900" b="0">
+                <a:solidFill>
+                  <a:srgbClr val="1B2733"/>
+                </a:solidFill>
+                <a:latin typeface="Calibri"/>
+              </a:rPr>
+              <a:t>Actualización Informe Relativo a Comites</a:t>
+            </a:r>
+          </a:p>
+        </p:txBody>
+      </p:sp>
+      <p:sp>
+        <p:nvSpPr>
+          <p:cNvPr id="132" name="Rounded Rectangle 131"/>
+          <p:cNvSpPr/>
+          <p:nvPr/>
+        </p:nvSpPr>
+        <p:spPr>
+          <a:xfrm>
+            <a:off x="6272784" y="4302251"/>
+            <a:ext cx="2496312" cy="338328"/>
+          </a:xfrm>
+          <a:prstGeom prst="roundRect">
+            <a:avLst>
+              <a:gd name="adj" fmla="val 20000"/>
+            </a:avLst>
+          </a:prstGeom>
+          <a:solidFill>
+            <a:srgbClr val="DCE8F5"/>
+          </a:solidFill>
+          <a:ln>
+            <a:noFill/>
+          </a:ln>
+          <a:effectLst/>
+        </p:spPr>
+        <p:style>
+          <a:lnRef idx="1">
+            <a:schemeClr val="accent1"/>
+          </a:lnRef>
+          <a:fillRef idx="3">
+            <a:schemeClr val="accent1"/>
+          </a:fillRef>
+          <a:effectRef idx="2">
+            <a:schemeClr val="accent1"/>
+          </a:effectRef>
+          <a:fontRef idx="minor">
+            <a:schemeClr val="lt1"/>
+          </a:fontRef>
+        </p:style>
+        <p:txBody>
+          <a:bodyPr rtlCol="0" anchor="ctr"/>
+          <a:lstStyle/>
+          <a:p>
+            <a:pPr algn="ctr"/>
+          </a:p>
+        </p:txBody>
+      </p:sp>
+      <p:sp>
+        <p:nvSpPr>
+          <p:cNvPr id="133" name="TextBox 132"/>
+          <p:cNvSpPr txBox="1"/>
+          <p:nvPr/>
+        </p:nvSpPr>
+        <p:spPr>
+          <a:xfrm>
+            <a:off x="6364224" y="4329683"/>
+            <a:ext cx="2313432" cy="283464"/>
+          </a:xfrm>
+          <a:prstGeom prst="rect">
+            <a:avLst/>
+          </a:prstGeom>
+          <a:noFill/>
+        </p:spPr>
+        <p:txBody>
+          <a:bodyPr wrap="square" lIns="0" rIns="0" tIns="0" bIns="0" anchor="t">
+            <a:spAutoFit/>
+          </a:bodyPr>
+          <a:lstStyle/>
+          <a:p>
+            <a:pPr algn="l"/>
+            <a:r>
+              <a:rPr sz="950" b="1">
+                <a:solidFill>
+                  <a:srgbClr val="0B2545"/>
+                </a:solidFill>
+                <a:latin typeface="Calibri"/>
+              </a:rPr>
+              <a:t>3. Actuazliacion de marco normative departamento de administración de riesgos</a:t>
+            </a:r>
+          </a:p>
+        </p:txBody>
+      </p:sp>
+      <p:sp>
+        <p:nvSpPr>
+          <p:cNvPr id="134" name="Rounded Rectangle 133"/>
+          <p:cNvSpPr/>
+          <p:nvPr/>
+        </p:nvSpPr>
+        <p:spPr>
+          <a:xfrm>
+            <a:off x="6272784" y="4695443"/>
+            <a:ext cx="2496312" cy="338328"/>
+          </a:xfrm>
+          <a:prstGeom prst="roundRect">
+            <a:avLst>
+              <a:gd name="adj" fmla="val 20000"/>
+            </a:avLst>
+          </a:prstGeom>
+          <a:solidFill>
+            <a:srgbClr val="DCE8F5"/>
+          </a:solidFill>
+          <a:ln>
+            <a:noFill/>
+          </a:ln>
+          <a:effectLst/>
+        </p:spPr>
+        <p:style>
+          <a:lnRef idx="1">
+            <a:schemeClr val="accent1"/>
+          </a:lnRef>
+          <a:fillRef idx="3">
+            <a:schemeClr val="accent1"/>
+          </a:fillRef>
+          <a:effectRef idx="2">
+            <a:schemeClr val="accent1"/>
+          </a:effectRef>
+          <a:fontRef idx="minor">
+            <a:schemeClr val="lt1"/>
+          </a:fontRef>
+        </p:style>
+        <p:txBody>
+          <a:bodyPr rtlCol="0" anchor="ctr"/>
+          <a:lstStyle/>
+          <a:p>
+            <a:pPr algn="ctr"/>
+          </a:p>
+        </p:txBody>
+      </p:sp>
+      <p:sp>
+        <p:nvSpPr>
+          <p:cNvPr id="135" name="TextBox 134"/>
+          <p:cNvSpPr txBox="1"/>
+          <p:nvPr/>
+        </p:nvSpPr>
+        <p:spPr>
+          <a:xfrm>
+            <a:off x="6364224" y="4722875"/>
+            <a:ext cx="2313432" cy="283464"/>
+          </a:xfrm>
+          <a:prstGeom prst="rect">
+            <a:avLst/>
+          </a:prstGeom>
+          <a:noFill/>
+        </p:spPr>
+        <p:txBody>
+          <a:bodyPr wrap="square" lIns="0" rIns="0" tIns="0" bIns="0" anchor="t">
+            <a:spAutoFit/>
+          </a:bodyPr>
+          <a:lstStyle/>
+          <a:p>
+            <a:pPr algn="l"/>
+            <a:r>
+              <a:rPr sz="950" b="1">
+                <a:solidFill>
+                  <a:srgbClr val="0B2545"/>
+                </a:solidFill>
+                <a:latin typeface="Calibri"/>
+              </a:rPr>
+              <a:t>4. Actualización de política de servicios tercerizados</a:t>
+            </a:r>
+          </a:p>
+        </p:txBody>
+      </p:sp>
+      <p:sp>
+        <p:nvSpPr>
+          <p:cNvPr id="136" name="Rounded Rectangle 135"/>
+          <p:cNvSpPr/>
+          <p:nvPr/>
+        </p:nvSpPr>
+        <p:spPr>
+          <a:xfrm>
+            <a:off x="9015984" y="2441448"/>
+            <a:ext cx="2715768" cy="4096512"/>
+          </a:xfrm>
+          <a:prstGeom prst="roundRect">
+            <a:avLst>
+              <a:gd name="adj" fmla="val 4000"/>
+            </a:avLst>
+          </a:prstGeom>
+          <a:solidFill>
+            <a:srgbClr val="EEF2F7"/>
+          </a:solidFill>
+          <a:ln>
+            <a:noFill/>
+          </a:ln>
+          <a:effectLst/>
+        </p:spPr>
+        <p:style>
+          <a:lnRef idx="1">
+            <a:schemeClr val="accent1"/>
+          </a:lnRef>
+          <a:fillRef idx="3">
+            <a:schemeClr val="accent1"/>
+          </a:fillRef>
+          <a:effectRef idx="2">
+            <a:schemeClr val="accent1"/>
+          </a:effectRef>
+          <a:fontRef idx="minor">
+            <a:schemeClr val="lt1"/>
+          </a:fontRef>
+        </p:style>
+        <p:txBody>
+          <a:bodyPr rtlCol="0" anchor="ctr"/>
+          <a:lstStyle/>
+          <a:p>
+            <a:pPr algn="ctr"/>
+          </a:p>
+        </p:txBody>
+      </p:sp>
+      <p:sp>
+        <p:nvSpPr>
+          <p:cNvPr id="137" name="Rounded Rectangle 136"/>
+          <p:cNvSpPr/>
+          <p:nvPr/>
+        </p:nvSpPr>
+        <p:spPr>
+          <a:xfrm>
+            <a:off x="9125711" y="2551176"/>
+            <a:ext cx="2496312" cy="196596"/>
+          </a:xfrm>
+          <a:prstGeom prst="roundRect">
+            <a:avLst>
+              <a:gd name="adj" fmla="val 20000"/>
+            </a:avLst>
+          </a:prstGeom>
+          <a:solidFill>
+            <a:srgbClr val="DCE8F5"/>
+          </a:solidFill>
+          <a:ln>
+            <a:noFill/>
+          </a:ln>
+          <a:effectLst/>
+        </p:spPr>
+        <p:style>
+          <a:lnRef idx="1">
+            <a:schemeClr val="accent1"/>
+          </a:lnRef>
+          <a:fillRef idx="3">
+            <a:schemeClr val="accent1"/>
+          </a:fillRef>
+          <a:effectRef idx="2">
+            <a:schemeClr val="accent1"/>
+          </a:effectRef>
+          <a:fontRef idx="minor">
+            <a:schemeClr val="lt1"/>
+          </a:fontRef>
+        </p:style>
+        <p:txBody>
+          <a:bodyPr rtlCol="0" anchor="ctr"/>
+          <a:lstStyle/>
+          <a:p>
+            <a:pPr algn="ctr"/>
+          </a:p>
+        </p:txBody>
+      </p:sp>
+      <p:sp>
+        <p:nvSpPr>
+          <p:cNvPr id="138" name="TextBox 137"/>
+          <p:cNvSpPr txBox="1"/>
+          <p:nvPr/>
+        </p:nvSpPr>
+        <p:spPr>
+          <a:xfrm>
+            <a:off x="9217151" y="2578608"/>
+            <a:ext cx="2313432" cy="141732"/>
+          </a:xfrm>
+          <a:prstGeom prst="rect">
+            <a:avLst/>
+          </a:prstGeom>
+          <a:noFill/>
+        </p:spPr>
+        <p:txBody>
+          <a:bodyPr wrap="square" lIns="0" rIns="0" tIns="0" bIns="0" anchor="t">
+            <a:spAutoFit/>
+          </a:bodyPr>
+          <a:lstStyle/>
+          <a:p>
+            <a:pPr algn="l"/>
+            <a:r>
+              <a:rPr sz="950" b="1">
+                <a:solidFill>
+                  <a:srgbClr val="0B2545"/>
+                </a:solidFill>
+                <a:latin typeface="Calibri"/>
+              </a:rPr>
+              <a:t>1. Informe de Análisis de Cartera de TC</a:t>
+            </a:r>
+          </a:p>
+        </p:txBody>
+      </p:sp>
+      <p:sp>
+        <p:nvSpPr>
+          <p:cNvPr id="139" name="Rounded Rectangle 138"/>
+          <p:cNvSpPr/>
+          <p:nvPr/>
+        </p:nvSpPr>
+        <p:spPr>
+          <a:xfrm>
+            <a:off x="9125711" y="2802636"/>
+            <a:ext cx="2496312" cy="196596"/>
+          </a:xfrm>
+          <a:prstGeom prst="roundRect">
+            <a:avLst>
+              <a:gd name="adj" fmla="val 20000"/>
+            </a:avLst>
+          </a:prstGeom>
+          <a:solidFill>
+            <a:srgbClr val="DCE8F5"/>
+          </a:solidFill>
+          <a:ln>
+            <a:noFill/>
+          </a:ln>
+          <a:effectLst/>
+        </p:spPr>
+        <p:style>
+          <a:lnRef idx="1">
+            <a:schemeClr val="accent1"/>
+          </a:lnRef>
+          <a:fillRef idx="3">
+            <a:schemeClr val="accent1"/>
+          </a:fillRef>
+          <a:effectRef idx="2">
+            <a:schemeClr val="accent1"/>
+          </a:effectRef>
+          <a:fontRef idx="minor">
+            <a:schemeClr val="lt1"/>
+          </a:fontRef>
+        </p:style>
+        <p:txBody>
+          <a:bodyPr rtlCol="0" anchor="ctr"/>
+          <a:lstStyle/>
+          <a:p>
+            <a:pPr algn="ctr"/>
+          </a:p>
+        </p:txBody>
+      </p:sp>
+      <p:sp>
+        <p:nvSpPr>
+          <p:cNvPr id="140" name="TextBox 139"/>
+          <p:cNvSpPr txBox="1"/>
+          <p:nvPr/>
+        </p:nvSpPr>
+        <p:spPr>
+          <a:xfrm>
+            <a:off x="9217151" y="2830068"/>
+            <a:ext cx="2313432" cy="141732"/>
+          </a:xfrm>
+          <a:prstGeom prst="rect">
+            <a:avLst/>
+          </a:prstGeom>
+          <a:noFill/>
+        </p:spPr>
+        <p:txBody>
+          <a:bodyPr wrap="square" lIns="0" rIns="0" tIns="0" bIns="0" anchor="t">
+            <a:spAutoFit/>
+          </a:bodyPr>
+          <a:lstStyle/>
+          <a:p>
+            <a:pPr algn="l"/>
+            <a:r>
+              <a:rPr sz="950" b="1">
+                <a:solidFill>
+                  <a:srgbClr val="0B2545"/>
+                </a:solidFill>
+                <a:latin typeface="Calibri"/>
+              </a:rPr>
+              <a:t>2. Simulación de cartera vencida</a:t>
+            </a:r>
+          </a:p>
+        </p:txBody>
+      </p:sp>
+      <p:sp>
+        <p:nvSpPr>
+          <p:cNvPr id="141" name="Rounded Rectangle 140"/>
+          <p:cNvSpPr/>
+          <p:nvPr/>
+        </p:nvSpPr>
+        <p:spPr>
+          <a:xfrm>
+            <a:off x="9125711" y="3054096"/>
+            <a:ext cx="2496312" cy="196596"/>
+          </a:xfrm>
+          <a:prstGeom prst="roundRect">
+            <a:avLst>
+              <a:gd name="adj" fmla="val 20000"/>
+            </a:avLst>
+          </a:prstGeom>
+          <a:solidFill>
+            <a:srgbClr val="DCE8F5"/>
+          </a:solidFill>
+          <a:ln>
+            <a:noFill/>
+          </a:ln>
+          <a:effectLst/>
+        </p:spPr>
+        <p:style>
+          <a:lnRef idx="1">
+            <a:schemeClr val="accent1"/>
+          </a:lnRef>
+          <a:fillRef idx="3">
+            <a:schemeClr val="accent1"/>
+          </a:fillRef>
+          <a:effectRef idx="2">
+            <a:schemeClr val="accent1"/>
+          </a:effectRef>
+          <a:fontRef idx="minor">
+            <a:schemeClr val="lt1"/>
+          </a:fontRef>
+        </p:style>
+        <p:txBody>
+          <a:bodyPr rtlCol="0" anchor="ctr"/>
+          <a:lstStyle/>
+          <a:p>
+            <a:pPr algn="ctr"/>
+          </a:p>
+        </p:txBody>
+      </p:sp>
+      <p:sp>
+        <p:nvSpPr>
+          <p:cNvPr id="142" name="TextBox 141"/>
+          <p:cNvSpPr txBox="1"/>
+          <p:nvPr/>
+        </p:nvSpPr>
+        <p:spPr>
+          <a:xfrm>
+            <a:off x="9217151" y="3081527"/>
+            <a:ext cx="2313432" cy="141732"/>
+          </a:xfrm>
+          <a:prstGeom prst="rect">
+            <a:avLst/>
+          </a:prstGeom>
+          <a:noFill/>
+        </p:spPr>
+        <p:txBody>
+          <a:bodyPr wrap="square" lIns="0" rIns="0" tIns="0" bIns="0" anchor="t">
+            <a:spAutoFit/>
+          </a:bodyPr>
+          <a:lstStyle/>
+          <a:p>
+            <a:pPr algn="l"/>
+            <a:r>
+              <a:rPr sz="950" b="1">
+                <a:solidFill>
+                  <a:srgbClr val="0B2545"/>
+                </a:solidFill>
+                <a:latin typeface="Calibri"/>
+              </a:rPr>
+              <a:t>3. Actualización de Política de TC</a:t>
+            </a:r>
+          </a:p>
+        </p:txBody>
+      </p:sp>
+      <p:sp>
+        <p:nvSpPr>
+          <p:cNvPr id="143" name="Rounded Rectangle 142"/>
+          <p:cNvSpPr/>
+          <p:nvPr/>
+        </p:nvSpPr>
+        <p:spPr>
+          <a:xfrm>
+            <a:off x="9125711" y="3305556"/>
+            <a:ext cx="2496312" cy="338328"/>
+          </a:xfrm>
+          <a:prstGeom prst="roundRect">
+            <a:avLst>
+              <a:gd name="adj" fmla="val 20000"/>
+            </a:avLst>
+          </a:prstGeom>
+          <a:solidFill>
+            <a:srgbClr val="DCE8F5"/>
+          </a:solidFill>
+          <a:ln>
+            <a:noFill/>
+          </a:ln>
+          <a:effectLst/>
+        </p:spPr>
+        <p:style>
+          <a:lnRef idx="1">
+            <a:schemeClr val="accent1"/>
+          </a:lnRef>
+          <a:fillRef idx="3">
+            <a:schemeClr val="accent1"/>
+          </a:fillRef>
+          <a:effectRef idx="2">
+            <a:schemeClr val="accent1"/>
+          </a:effectRef>
+          <a:fontRef idx="minor">
+            <a:schemeClr val="lt1"/>
+          </a:fontRef>
+        </p:style>
+        <p:txBody>
+          <a:bodyPr rtlCol="0" anchor="ctr"/>
+          <a:lstStyle/>
+          <a:p>
+            <a:pPr algn="ctr"/>
+          </a:p>
+        </p:txBody>
+      </p:sp>
+      <p:sp>
+        <p:nvSpPr>
+          <p:cNvPr id="144" name="TextBox 143"/>
+          <p:cNvSpPr txBox="1"/>
+          <p:nvPr/>
+        </p:nvSpPr>
+        <p:spPr>
+          <a:xfrm>
+            <a:off x="9217151" y="3332987"/>
+            <a:ext cx="2313432" cy="283464"/>
+          </a:xfrm>
+          <a:prstGeom prst="rect">
+            <a:avLst/>
+          </a:prstGeom>
+          <a:noFill/>
+        </p:spPr>
+        <p:txBody>
+          <a:bodyPr wrap="square" lIns="0" rIns="0" tIns="0" bIns="0" anchor="t">
+            <a:spAutoFit/>
+          </a:bodyPr>
+          <a:lstStyle/>
+          <a:p>
+            <a:pPr algn="l"/>
+            <a:r>
+              <a:rPr sz="950" b="1">
+                <a:solidFill>
+                  <a:srgbClr val="0B2545"/>
+                </a:solidFill>
+                <a:latin typeface="Calibri"/>
+              </a:rPr>
+              <a:t>4. Envío de información a la Central de Riesgo (NRP-41)</a:t>
+            </a:r>
+          </a:p>
+        </p:txBody>
+      </p:sp>
+      <p:sp>
+        <p:nvSpPr>
+          <p:cNvPr id="145" name="Rounded Rectangle 144"/>
+          <p:cNvSpPr/>
+          <p:nvPr/>
+        </p:nvSpPr>
+        <p:spPr>
+          <a:xfrm>
+            <a:off x="9125711" y="3698748"/>
+            <a:ext cx="2496312" cy="338328"/>
+          </a:xfrm>
+          <a:prstGeom prst="roundRect">
+            <a:avLst>
+              <a:gd name="adj" fmla="val 20000"/>
+            </a:avLst>
+          </a:prstGeom>
+          <a:solidFill>
+            <a:srgbClr val="DCE8F5"/>
+          </a:solidFill>
+          <a:ln>
+            <a:noFill/>
+          </a:ln>
+          <a:effectLst/>
+        </p:spPr>
+        <p:style>
+          <a:lnRef idx="1">
+            <a:schemeClr val="accent1"/>
+          </a:lnRef>
+          <a:fillRef idx="3">
+            <a:schemeClr val="accent1"/>
+          </a:fillRef>
+          <a:effectRef idx="2">
+            <a:schemeClr val="accent1"/>
+          </a:effectRef>
+          <a:fontRef idx="minor">
+            <a:schemeClr val="lt1"/>
+          </a:fontRef>
+        </p:style>
+        <p:txBody>
+          <a:bodyPr rtlCol="0" anchor="ctr"/>
+          <a:lstStyle/>
+          <a:p>
+            <a:pPr algn="ctr"/>
+          </a:p>
+        </p:txBody>
+      </p:sp>
+      <p:sp>
+        <p:nvSpPr>
+          <p:cNvPr id="146" name="TextBox 145"/>
+          <p:cNvSpPr txBox="1"/>
+          <p:nvPr/>
+        </p:nvSpPr>
+        <p:spPr>
+          <a:xfrm>
+            <a:off x="9217151" y="3726180"/>
+            <a:ext cx="2313432" cy="283464"/>
+          </a:xfrm>
+          <a:prstGeom prst="rect">
+            <a:avLst/>
+          </a:prstGeom>
+          <a:noFill/>
+        </p:spPr>
+        <p:txBody>
+          <a:bodyPr wrap="square" lIns="0" rIns="0" tIns="0" bIns="0" anchor="t">
+            <a:spAutoFit/>
+          </a:bodyPr>
+          <a:lstStyle/>
+          <a:p>
+            <a:pPr algn="l"/>
+            <a:r>
+              <a:rPr sz="950" b="1">
+                <a:solidFill>
+                  <a:srgbClr val="0B2545"/>
+                </a:solidFill>
+                <a:latin typeface="Calibri"/>
+              </a:rPr>
+              <a:t>5. Monitoreo semanal de la reserva de saneamiento</a:t>
+            </a:r>
+          </a:p>
+        </p:txBody>
+      </p:sp>
+      <p:sp>
+        <p:nvSpPr>
+          <p:cNvPr id="147" name="Rounded Rectangle 146"/>
+          <p:cNvSpPr/>
+          <p:nvPr/>
+        </p:nvSpPr>
+        <p:spPr>
+          <a:xfrm>
+            <a:off x="9125711" y="4091939"/>
+            <a:ext cx="2496312" cy="338328"/>
+          </a:xfrm>
+          <a:prstGeom prst="roundRect">
+            <a:avLst>
+              <a:gd name="adj" fmla="val 20000"/>
+            </a:avLst>
+          </a:prstGeom>
+          <a:solidFill>
+            <a:srgbClr val="DCE8F5"/>
+          </a:solidFill>
+          <a:ln>
+            <a:noFill/>
+          </a:ln>
+          <a:effectLst/>
+        </p:spPr>
+        <p:style>
+          <a:lnRef idx="1">
+            <a:schemeClr val="accent1"/>
+          </a:lnRef>
+          <a:fillRef idx="3">
+            <a:schemeClr val="accent1"/>
+          </a:fillRef>
+          <a:effectRef idx="2">
+            <a:schemeClr val="accent1"/>
+          </a:effectRef>
+          <a:fontRef idx="minor">
+            <a:schemeClr val="lt1"/>
+          </a:fontRef>
+        </p:style>
+        <p:txBody>
+          <a:bodyPr rtlCol="0" anchor="ctr"/>
+          <a:lstStyle/>
+          <a:p>
+            <a:pPr algn="ctr"/>
+          </a:p>
+        </p:txBody>
+      </p:sp>
+      <p:sp>
+        <p:nvSpPr>
+          <p:cNvPr id="148" name="TextBox 147"/>
+          <p:cNvSpPr txBox="1"/>
+          <p:nvPr/>
+        </p:nvSpPr>
+        <p:spPr>
+          <a:xfrm>
+            <a:off x="9217151" y="4119372"/>
+            <a:ext cx="2313432" cy="283464"/>
+          </a:xfrm>
+          <a:prstGeom prst="rect">
+            <a:avLst/>
+          </a:prstGeom>
+          <a:noFill/>
+        </p:spPr>
+        <p:txBody>
+          <a:bodyPr wrap="square" lIns="0" rIns="0" tIns="0" bIns="0" anchor="t">
+            <a:spAutoFit/>
+          </a:bodyPr>
+          <a:lstStyle/>
+          <a:p>
+            <a:pPr algn="l"/>
+            <a:r>
+              <a:rPr sz="950" b="1">
+                <a:solidFill>
+                  <a:srgbClr val="0B2545"/>
+                </a:solidFill>
+                <a:latin typeface="Calibri"/>
+              </a:rPr>
+              <a:t>6. Registro permanente de los traslados de deuda</a:t>
+            </a:r>
+          </a:p>
+        </p:txBody>
+      </p:sp>
+      <p:sp>
+        <p:nvSpPr>
+          <p:cNvPr id="149" name="Rounded Rectangle 148"/>
+          <p:cNvSpPr/>
+          <p:nvPr/>
+        </p:nvSpPr>
+        <p:spPr>
+          <a:xfrm>
+            <a:off x="9125711" y="4485131"/>
+            <a:ext cx="2496312" cy="338328"/>
+          </a:xfrm>
+          <a:prstGeom prst="roundRect">
+            <a:avLst>
+              <a:gd name="adj" fmla="val 20000"/>
+            </a:avLst>
+          </a:prstGeom>
+          <a:solidFill>
+            <a:srgbClr val="DCE8F5"/>
+          </a:solidFill>
+          <a:ln>
+            <a:noFill/>
+          </a:ln>
+          <a:effectLst/>
+        </p:spPr>
+        <p:style>
+          <a:lnRef idx="1">
+            <a:schemeClr val="accent1"/>
+          </a:lnRef>
+          <a:fillRef idx="3">
+            <a:schemeClr val="accent1"/>
+          </a:fillRef>
+          <a:effectRef idx="2">
+            <a:schemeClr val="accent1"/>
+          </a:effectRef>
+          <a:fontRef idx="minor">
+            <a:schemeClr val="lt1"/>
+          </a:fontRef>
+        </p:style>
+        <p:txBody>
+          <a:bodyPr rtlCol="0" anchor="ctr"/>
+          <a:lstStyle/>
+          <a:p>
+            <a:pPr algn="ctr"/>
+          </a:p>
+        </p:txBody>
+      </p:sp>
+      <p:sp>
+        <p:nvSpPr>
+          <p:cNvPr id="150" name="TextBox 149"/>
+          <p:cNvSpPr txBox="1"/>
+          <p:nvPr/>
+        </p:nvSpPr>
+        <p:spPr>
+          <a:xfrm>
+            <a:off x="9217151" y="4512564"/>
+            <a:ext cx="2313432" cy="283464"/>
+          </a:xfrm>
+          <a:prstGeom prst="rect">
+            <a:avLst/>
+          </a:prstGeom>
+          <a:noFill/>
+        </p:spPr>
+        <p:txBody>
+          <a:bodyPr wrap="square" lIns="0" rIns="0" tIns="0" bIns="0" anchor="t">
+            <a:spAutoFit/>
+          </a:bodyPr>
+          <a:lstStyle/>
+          <a:p>
+            <a:pPr algn="l"/>
+            <a:r>
+              <a:rPr sz="950" b="1">
+                <a:solidFill>
+                  <a:srgbClr val="0B2545"/>
+                </a:solidFill>
+                <a:latin typeface="Calibri"/>
+              </a:rPr>
+              <a:t>7. Seguimiento acuerdos del Consejo de Administración</a:t>
+            </a:r>
           </a:p>
         </p:txBody>
       </p:sp>
